--- a/latex/figure/fig1_selective_governance.pptx
+++ b/latex/figure/fig1_selective_governance.pptx
@@ -7,7 +7,7 @@
   <p:sldIdLst>
     <p:sldId id="256" r:id="rId7"/>
   </p:sldIdLst>
-  <p:sldSz cx="5029200" cy="2489200" type="screen4x3"/>
+  <p:sldSz cx="5029200" cy="2514600" type="screen4x3"/>
   <p:notesSz cx="6858000" cy="9144000"/>
   <p:defaultTextStyle>
     <a:defPPr>
@@ -5264,7 +5264,7 @@
                 </a:solidFill>
                 <a:latin typeface="Helvetica"/>
               </a:rPr>
-              <a:t>Record the realised utility</a:t>
+              <a:t>Record the realised task loss</a:t>
             </a:r>
           </a:p>
         </p:txBody>
@@ -5299,7 +5299,7 @@
                 </a:solidFill>
                 <a:latin typeface="Helvetica"/>
               </a:rPr>
-              <a:t>g[i,a] = L(F(X[a0]),y) - L(F(X[a]),y)</a:t>
+              <a:t>L[i,a] and regret r[i,a] = L[i,a] - L*[i]</a:t>
             </a:r>
           </a:p>
         </p:txBody>
@@ -5334,7 +5334,7 @@
                 </a:solidFill>
                 <a:latin typeface="Helvetica"/>
               </a:rPr>
-              <a:t>replay bank  B = {(z[i], a, g[i,a])}</a:t>
+              <a:t>replay bank  B = {(z[i], a, L[i,a])}</a:t>
             </a:r>
           </a:p>
         </p:txBody>
@@ -5369,7 +5369,7 @@
                 </a:solidFill>
                 <a:latin typeface="Helvetica"/>
               </a:rPr>
-              <a:t>future labels are used only inside TRAIN,</a:t>
+              <a:t>the bank stores a task consequence,</a:t>
             </a:r>
           </a:p>
         </p:txBody>
@@ -5404,7 +5404,7 @@
                 </a:solidFill>
                 <a:latin typeface="Helvetica"/>
               </a:rPr>
-              <a:t>never at deployment</a:t>
+              <a:t>not a reconstruction score</a:t>
             </a:r>
           </a:p>
         </p:txBody>
@@ -5439,7 +5439,7 @@
                 </a:solidFill>
                 <a:latin typeface="Helvetica"/>
               </a:rPr>
-              <a:t>(c) Replay -&gt; Match -&gt; Act / Abstain</a:t>
+              <a:t>(c) Score -&gt; rank -&gt; select / KEEP</a:t>
             </a:r>
           </a:p>
         </p:txBody>
@@ -5640,7 +5640,7 @@
                 </a:solidFill>
                 <a:latin typeface="Helvetica"/>
               </a:rPr>
-              <a:t>Task-state matching</a:t>
+              <a:t>Observable state z</a:t>
             </a:r>
           </a:p>
         </p:txBody>
@@ -5675,7 +5675,7 @@
                 </a:solidFill>
                 <a:latin typeface="Helvetica"/>
               </a:rPr>
-              <a:t>over the replay bank</a:t>
+              <a:t>(no forecast is read)</a:t>
             </a:r>
           </a:p>
         </p:txBody>
@@ -5793,7 +5793,7 @@
                 </a:solidFill>
                 <a:latin typeface="Helvetica"/>
               </a:rPr>
-              <a:t>Conservative utility</a:t>
+              <a:t>Regret-aware scoring</a:t>
             </a:r>
           </a:p>
         </p:txBody>
@@ -5828,7 +5828,7 @@
                 </a:solidFill>
                 <a:latin typeface="Helvetica"/>
               </a:rPr>
-              <a:t>S[a] = mu[a] - beta*sig[a]/sqrt(n[a])</a:t>
+              <a:t>S[a] over the replay bank B</a:t>
             </a:r>
           </a:p>
         </p:txBody>
@@ -5876,8 +5876,8 @@
         </p:nvSpPr>
         <p:spPr>
           <a:xfrm>
-            <a:off x="3683000" y="1435100"/>
-            <a:ext cx="1066800" cy="330200"/>
+            <a:off x="3657600" y="1435100"/>
+            <a:ext cx="1117600" cy="330200"/>
           </a:xfrm>
           <a:prstGeom prst="diamond">
             <a:avLst/>
@@ -5922,8 +5922,8 @@
         </p:nvSpPr>
         <p:spPr>
           <a:xfrm>
-            <a:off x="2692400" y="1523619"/>
-            <a:ext cx="3048000" cy="176784"/>
+            <a:off x="2692400" y="1530477"/>
+            <a:ext cx="3048000" cy="164592"/>
           </a:xfrm>
           <a:prstGeom prst="rect">
             <a:avLst/>
@@ -5938,13 +5938,13 @@
           <a:p>
             <a:pPr algn="ctr"/>
             <a:r>
-              <a:rPr sz="580" b="0" i="0">
+              <a:rPr sz="540" b="0" i="0">
                 <a:solidFill>
                   <a:srgbClr val="1C1E23"/>
                 </a:solidFill>
                 <a:latin typeface="Helvetica"/>
               </a:rPr>
-              <a:t>max S[a] &gt; 0 ?</a:t>
+              <a:t>argmax S[a] = KEEP ?</a:t>
             </a:r>
           </a:p>
         </p:txBody>
@@ -6103,6 +6103,124 @@
           <a:prstGeom prst="roundRect">
             <a:avLst>
               <a:gd name="adj" fmla="val 2232"/>
+            </a:avLst>
+          </a:prstGeom>
+          <a:solidFill>
+            <a:srgbClr val="FCEAEA"/>
+          </a:solidFill>
+          <a:ln w="8890">
+            <a:solidFill>
+              <a:srgbClr val="AD2B2B"/>
+            </a:solidFill>
+          </a:ln>
+          <a:effectLst/>
+        </p:spPr>
+        <p:style>
+          <a:lnRef idx="1">
+            <a:schemeClr val="accent1"/>
+          </a:lnRef>
+          <a:fillRef idx="3">
+            <a:schemeClr val="accent1"/>
+          </a:fillRef>
+          <a:effectRef idx="2">
+            <a:schemeClr val="accent1"/>
+          </a:effectRef>
+          <a:fontRef idx="minor">
+            <a:schemeClr val="lt1"/>
+          </a:fontRef>
+        </p:style>
+        <p:txBody>
+          <a:bodyPr rtlCol="0" anchor="ctr"/>
+          <a:lstStyle/>
+          <a:p>
+            <a:pPr algn="ctr"/>
+          </a:p>
+        </p:txBody>
+      </p:sp>
+      <p:sp>
+        <p:nvSpPr>
+          <p:cNvPr id="62" name="TextBox 61"/>
+          <p:cNvSpPr txBox="1"/>
+          <p:nvPr/>
+        </p:nvSpPr>
+        <p:spPr>
+          <a:xfrm>
+            <a:off x="2260600" y="1960118"/>
+            <a:ext cx="3048000" cy="170688"/>
+          </a:xfrm>
+          <a:prstGeom prst="rect">
+            <a:avLst/>
+          </a:prstGeom>
+          <a:noFill/>
+        </p:spPr>
+        <p:txBody>
+          <a:bodyPr wrap="none" lIns="0" rIns="0" tIns="0" bIns="0" anchor="ctr">
+            <a:spAutoFit/>
+          </a:bodyPr>
+          <a:lstStyle/>
+          <a:p>
+            <a:pPr algn="ctr"/>
+            <a:r>
+              <a:rPr sz="560" b="1" i="0">
+                <a:solidFill>
+                  <a:srgbClr val="1C1E23"/>
+                </a:solidFill>
+                <a:latin typeface="Helvetica"/>
+              </a:rPr>
+              <a:t>KEEP</a:t>
+            </a:r>
+          </a:p>
+        </p:txBody>
+      </p:sp>
+      <p:sp>
+        <p:nvSpPr>
+          <p:cNvPr id="63" name="TextBox 62"/>
+          <p:cNvSpPr txBox="1"/>
+          <p:nvPr/>
+        </p:nvSpPr>
+        <p:spPr>
+          <a:xfrm>
+            <a:off x="2260600" y="2055368"/>
+            <a:ext cx="3048000" cy="170688"/>
+          </a:xfrm>
+          <a:prstGeom prst="rect">
+            <a:avLst/>
+          </a:prstGeom>
+          <a:noFill/>
+        </p:spPr>
+        <p:txBody>
+          <a:bodyPr wrap="none" lIns="0" rIns="0" tIns="0" bIns="0" anchor="ctr">
+            <a:spAutoFit/>
+          </a:bodyPr>
+          <a:lstStyle/>
+          <a:p>
+            <a:pPr algn="ctr"/>
+            <a:r>
+              <a:rPr sz="560" b="0" i="0">
+                <a:solidFill>
+                  <a:srgbClr val="1C1E23"/>
+                </a:solidFill>
+                <a:latin typeface="Helvetica"/>
+              </a:rPr>
+              <a:t>input untouched</a:t>
+            </a:r>
+          </a:p>
+        </p:txBody>
+      </p:sp>
+      <p:sp>
+        <p:nvSpPr>
+          <p:cNvPr id="64" name="Rounded Rectangle 63"/>
+          <p:cNvSpPr/>
+          <p:nvPr/>
+        </p:nvSpPr>
+        <p:spPr>
+          <a:xfrm>
+            <a:off x="4267200" y="1917700"/>
+            <a:ext cx="736600" cy="330200"/>
+          </a:xfrm>
+          <a:prstGeom prst="roundRect">
+            <a:avLst>
+              <a:gd name="adj" fmla="val 2155"/>
             </a:avLst>
           </a:prstGeom>
           <a:solidFill>
@@ -6139,13 +6257,13 @@
       </p:sp>
       <p:sp>
         <p:nvSpPr>
-          <p:cNvPr id="62" name="TextBox 61"/>
+          <p:cNvPr id="65" name="TextBox 64"/>
           <p:cNvSpPr txBox="1"/>
           <p:nvPr/>
         </p:nvSpPr>
         <p:spPr>
           <a:xfrm>
-            <a:off x="2260600" y="1960118"/>
+            <a:off x="3111500" y="1960118"/>
             <a:ext cx="3048000" cy="170688"/>
           </a:xfrm>
           <a:prstGeom prst="rect">
@@ -6167,20 +6285,20 @@
                 </a:solidFill>
                 <a:latin typeface="Helvetica"/>
               </a:rPr>
-              <a:t>ACT</a:t>
-            </a:r>
-          </a:p>
-        </p:txBody>
-      </p:sp>
-      <p:sp>
-        <p:nvSpPr>
-          <p:cNvPr id="63" name="TextBox 62"/>
+              <a:t>SELECT</a:t>
+            </a:r>
+          </a:p>
+        </p:txBody>
+      </p:sp>
+      <p:sp>
+        <p:nvSpPr>
+          <p:cNvPr id="66" name="TextBox 65"/>
           <p:cNvSpPr txBox="1"/>
           <p:nvPr/>
         </p:nvSpPr>
         <p:spPr>
           <a:xfrm>
-            <a:off x="2260600" y="2055368"/>
+            <a:off x="3111500" y="2055368"/>
             <a:ext cx="3048000" cy="170688"/>
           </a:xfrm>
           <a:prstGeom prst="rect">
@@ -6209,131 +6327,13 @@
       </p:sp>
       <p:sp>
         <p:nvSpPr>
-          <p:cNvPr id="64" name="Rounded Rectangle 63"/>
-          <p:cNvSpPr/>
-          <p:nvPr/>
-        </p:nvSpPr>
-        <p:spPr>
-          <a:xfrm>
-            <a:off x="4267200" y="1917700"/>
-            <a:ext cx="736600" cy="330200"/>
-          </a:xfrm>
-          <a:prstGeom prst="roundRect">
-            <a:avLst>
-              <a:gd name="adj" fmla="val 2155"/>
-            </a:avLst>
-          </a:prstGeom>
-          <a:solidFill>
-            <a:srgbClr val="FCEAEA"/>
-          </a:solidFill>
-          <a:ln w="8890">
-            <a:solidFill>
-              <a:srgbClr val="AD2B2B"/>
-            </a:solidFill>
-          </a:ln>
-          <a:effectLst/>
-        </p:spPr>
-        <p:style>
-          <a:lnRef idx="1">
-            <a:schemeClr val="accent1"/>
-          </a:lnRef>
-          <a:fillRef idx="3">
-            <a:schemeClr val="accent1"/>
-          </a:fillRef>
-          <a:effectRef idx="2">
-            <a:schemeClr val="accent1"/>
-          </a:effectRef>
-          <a:fontRef idx="minor">
-            <a:schemeClr val="lt1"/>
-          </a:fontRef>
-        </p:style>
-        <p:txBody>
-          <a:bodyPr rtlCol="0" anchor="ctr"/>
-          <a:lstStyle/>
-          <a:p>
-            <a:pPr algn="ctr"/>
-          </a:p>
-        </p:txBody>
-      </p:sp>
-      <p:sp>
-        <p:nvSpPr>
-          <p:cNvPr id="65" name="TextBox 64"/>
-          <p:cNvSpPr txBox="1"/>
-          <p:nvPr/>
-        </p:nvSpPr>
-        <p:spPr>
-          <a:xfrm>
-            <a:off x="3111500" y="1960118"/>
-            <a:ext cx="3048000" cy="170688"/>
-          </a:xfrm>
-          <a:prstGeom prst="rect">
-            <a:avLst/>
-          </a:prstGeom>
-          <a:noFill/>
-        </p:spPr>
-        <p:txBody>
-          <a:bodyPr wrap="none" lIns="0" rIns="0" tIns="0" bIns="0" anchor="ctr">
-            <a:spAutoFit/>
-          </a:bodyPr>
-          <a:lstStyle/>
-          <a:p>
-            <a:pPr algn="ctr"/>
-            <a:r>
-              <a:rPr sz="560" b="1" i="0">
-                <a:solidFill>
-                  <a:srgbClr val="1C1E23"/>
-                </a:solidFill>
-                <a:latin typeface="Helvetica"/>
-              </a:rPr>
-              <a:t>ABSTAIN</a:t>
-            </a:r>
-          </a:p>
-        </p:txBody>
-      </p:sp>
-      <p:sp>
-        <p:nvSpPr>
-          <p:cNvPr id="66" name="TextBox 65"/>
-          <p:cNvSpPr txBox="1"/>
-          <p:nvPr/>
-        </p:nvSpPr>
-        <p:spPr>
-          <a:xfrm>
-            <a:off x="3111500" y="2055368"/>
-            <a:ext cx="3048000" cy="170688"/>
-          </a:xfrm>
-          <a:prstGeom prst="rect">
-            <a:avLst/>
-          </a:prstGeom>
-          <a:noFill/>
-        </p:spPr>
-        <p:txBody>
-          <a:bodyPr wrap="none" lIns="0" rIns="0" tIns="0" bIns="0" anchor="ctr">
-            <a:spAutoFit/>
-          </a:bodyPr>
-          <a:lstStyle/>
-          <a:p>
-            <a:pPr algn="ctr"/>
-            <a:r>
-              <a:rPr sz="560" b="0" i="0">
-                <a:solidFill>
-                  <a:srgbClr val="1C1E23"/>
-                </a:solidFill>
-                <a:latin typeface="Helvetica"/>
-              </a:rPr>
-              <a:t>return F(X[a0])</a:t>
-            </a:r>
-          </a:p>
-        </p:txBody>
-      </p:sp>
-      <p:sp>
-        <p:nvSpPr>
           <p:cNvPr id="67" name="TextBox 66"/>
           <p:cNvSpPr txBox="1"/>
           <p:nvPr/>
         </p:nvSpPr>
         <p:spPr>
           <a:xfrm>
-            <a:off x="2692400" y="2273046"/>
+            <a:off x="990600" y="2311146"/>
             <a:ext cx="3048000" cy="158496"/>
           </a:xfrm>
           <a:prstGeom prst="rect">
@@ -6355,7 +6355,7 @@
                 </a:solidFill>
                 <a:latin typeface="Helvetica"/>
               </a:rPr>
-              <a:t>exactly one real TSFM forecast is returned</a:t>
+              <a:t>KEEP is one of the arms, so abstention is a decision outcome</a:t>
             </a:r>
           </a:p>
         </p:txBody>
@@ -6369,7 +6369,7 @@
         <p:spPr>
           <a:xfrm>
             <a:off x="1689100" y="304800"/>
-            <a:ext cx="0" cy="2032000"/>
+            <a:ext cx="0" cy="2006600"/>
           </a:xfrm>
           <a:prstGeom prst="line">
             <a:avLst/>
@@ -6405,7 +6405,7 @@
         <p:spPr>
           <a:xfrm>
             <a:off x="3390900" y="304800"/>
-            <a:ext cx="0" cy="2032000"/>
+            <a:ext cx="0" cy="2006600"/>
           </a:xfrm>
           <a:prstGeom prst="line">
             <a:avLst/>

--- a/latex/figure/fig1_selective_governance.pptx
+++ b/latex/figure/fig1_selective_governance.pptx
@@ -3118,7 +3118,7 @@
                 </a:solidFill>
                 <a:latin typeface="Helvetica"/>
               </a:rPr>
-              <a:t>(a) Same incomplete context,</a:t>
+              <a:t>(a) Oracle-best action</a:t>
             </a:r>
           </a:p>
         </p:txBody>
@@ -3153,33 +3153,659 @@
                 </a:solidFill>
                 <a:latin typeface="Helvetica"/>
               </a:rPr>
-              <a:t>different best action</a:t>
-            </a:r>
-          </a:p>
-        </p:txBody>
-      </p:sp>
-      <p:sp>
-        <p:nvSpPr>
-          <p:cNvPr id="4" name="Rounded Rectangle 3"/>
-          <p:cNvSpPr/>
-          <p:nvPr/>
-        </p:nvSpPr>
-        <p:spPr>
-          <a:xfrm>
-            <a:off x="50800" y="330200"/>
-            <a:ext cx="1625600" cy="381000"/>
-          </a:xfrm>
-          <a:prstGeom prst="roundRect">
-            <a:avLst>
-              <a:gd name="adj" fmla="val 781"/>
-            </a:avLst>
-          </a:prstGeom>
-          <a:solidFill>
-            <a:srgbClr val="FFFFFF"/>
-          </a:solidFill>
+              <a:t>share on the evaluation episodes</a:t>
+            </a:r>
+          </a:p>
+        </p:txBody>
+      </p:sp>
+      <p:cxnSp>
+        <p:nvCxnSpPr>
+          <p:cNvPr id="4" name="Connector 3"/>
+          <p:cNvCxnSpPr/>
+          <p:nvPr/>
+        </p:nvCxnSpPr>
+        <p:spPr>
+          <a:xfrm>
+            <a:off x="228600" y="1524000"/>
+            <a:ext cx="1346200" cy="0"/>
+          </a:xfrm>
+          <a:prstGeom prst="line">
+            <a:avLst/>
+          </a:prstGeom>
+          <a:ln w="8890">
+            <a:solidFill>
+              <a:srgbClr val="1C1E23"/>
+            </a:solidFill>
+          </a:ln>
+        </p:spPr>
+        <p:style>
+          <a:lnRef idx="2">
+            <a:schemeClr val="accent1"/>
+          </a:lnRef>
+          <a:fillRef idx="0">
+            <a:schemeClr val="accent1"/>
+          </a:fillRef>
+          <a:effectRef idx="1">
+            <a:schemeClr val="accent1"/>
+          </a:effectRef>
+          <a:fontRef idx="minor">
+            <a:schemeClr val="tx1"/>
+          </a:fontRef>
+        </p:style>
+      </p:cxnSp>
+      <p:cxnSp>
+        <p:nvCxnSpPr>
+          <p:cNvPr id="5" name="Connector 4"/>
+          <p:cNvCxnSpPr/>
+          <p:nvPr/>
+        </p:nvCxnSpPr>
+        <p:spPr>
+          <a:xfrm>
+            <a:off x="228600" y="381000"/>
+            <a:ext cx="0" cy="1143000"/>
+          </a:xfrm>
+          <a:prstGeom prst="line">
+            <a:avLst/>
+          </a:prstGeom>
+          <a:ln w="8890">
+            <a:solidFill>
+              <a:srgbClr val="1C1E23"/>
+            </a:solidFill>
+          </a:ln>
+        </p:spPr>
+        <p:style>
+          <a:lnRef idx="2">
+            <a:schemeClr val="accent1"/>
+          </a:lnRef>
+          <a:fillRef idx="0">
+            <a:schemeClr val="accent1"/>
+          </a:fillRef>
+          <a:effectRef idx="1">
+            <a:schemeClr val="accent1"/>
+          </a:effectRef>
+          <a:fontRef idx="minor">
+            <a:schemeClr val="tx1"/>
+          </a:fontRef>
+        </p:style>
+      </p:cxnSp>
+      <p:cxnSp>
+        <p:nvCxnSpPr>
+          <p:cNvPr id="6" name="Connector 5"/>
+          <p:cNvCxnSpPr/>
+          <p:nvPr/>
+        </p:nvCxnSpPr>
+        <p:spPr>
+          <a:xfrm>
+            <a:off x="196850" y="1524000"/>
+            <a:ext cx="31750" cy="0"/>
+          </a:xfrm>
+          <a:prstGeom prst="line">
+            <a:avLst/>
+          </a:prstGeom>
           <a:ln w="7620">
             <a:solidFill>
-              <a:srgbClr val="CCCED3"/>
+              <a:srgbClr val="1C1E23"/>
+            </a:solidFill>
+          </a:ln>
+        </p:spPr>
+        <p:style>
+          <a:lnRef idx="2">
+            <a:schemeClr val="accent1"/>
+          </a:lnRef>
+          <a:fillRef idx="0">
+            <a:schemeClr val="accent1"/>
+          </a:fillRef>
+          <a:effectRef idx="1">
+            <a:schemeClr val="accent1"/>
+          </a:effectRef>
+          <a:fontRef idx="minor">
+            <a:schemeClr val="tx1"/>
+          </a:fontRef>
+        </p:style>
+      </p:cxnSp>
+      <p:sp>
+        <p:nvSpPr>
+          <p:cNvPr id="7" name="TextBox 6"/>
+          <p:cNvSpPr txBox="1"/>
+          <p:nvPr/>
+        </p:nvSpPr>
+        <p:spPr>
+          <a:xfrm>
+            <a:off x="-1341120" y="1455547"/>
+            <a:ext cx="3048000" cy="164592"/>
+          </a:xfrm>
+          <a:prstGeom prst="rect">
+            <a:avLst/>
+          </a:prstGeom>
+          <a:noFill/>
+        </p:spPr>
+        <p:txBody>
+          <a:bodyPr wrap="none" lIns="0" rIns="0" tIns="0" bIns="0" anchor="ctr">
+            <a:spAutoFit/>
+          </a:bodyPr>
+          <a:lstStyle/>
+          <a:p>
+            <a:pPr algn="r"/>
+            <a:r>
+              <a:rPr sz="540" b="0" i="0">
+                <a:solidFill>
+                  <a:srgbClr val="6B727C"/>
+                </a:solidFill>
+                <a:latin typeface="Helvetica"/>
+              </a:rPr>
+              <a:t>0</a:t>
+            </a:r>
+          </a:p>
+        </p:txBody>
+      </p:sp>
+      <p:cxnSp>
+        <p:nvCxnSpPr>
+          <p:cNvPr id="8" name="Connector 7"/>
+          <p:cNvCxnSpPr/>
+          <p:nvPr/>
+        </p:nvCxnSpPr>
+        <p:spPr>
+          <a:xfrm>
+            <a:off x="196850" y="952500"/>
+            <a:ext cx="31750" cy="0"/>
+          </a:xfrm>
+          <a:prstGeom prst="line">
+            <a:avLst/>
+          </a:prstGeom>
+          <a:ln w="7620">
+            <a:solidFill>
+              <a:srgbClr val="1C1E23"/>
+            </a:solidFill>
+          </a:ln>
+        </p:spPr>
+        <p:style>
+          <a:lnRef idx="2">
+            <a:schemeClr val="accent1"/>
+          </a:lnRef>
+          <a:fillRef idx="0">
+            <a:schemeClr val="accent1"/>
+          </a:fillRef>
+          <a:effectRef idx="1">
+            <a:schemeClr val="accent1"/>
+          </a:effectRef>
+          <a:fontRef idx="minor">
+            <a:schemeClr val="tx1"/>
+          </a:fontRef>
+        </p:style>
+      </p:cxnSp>
+      <p:sp>
+        <p:nvSpPr>
+          <p:cNvPr id="9" name="TextBox 8"/>
+          <p:cNvSpPr txBox="1"/>
+          <p:nvPr/>
+        </p:nvSpPr>
+        <p:spPr>
+          <a:xfrm>
+            <a:off x="-1341120" y="884047"/>
+            <a:ext cx="3048000" cy="164592"/>
+          </a:xfrm>
+          <a:prstGeom prst="rect">
+            <a:avLst/>
+          </a:prstGeom>
+          <a:noFill/>
+        </p:spPr>
+        <p:txBody>
+          <a:bodyPr wrap="none" lIns="0" rIns="0" tIns="0" bIns="0" anchor="ctr">
+            <a:spAutoFit/>
+          </a:bodyPr>
+          <a:lstStyle/>
+          <a:p>
+            <a:pPr algn="r"/>
+            <a:r>
+              <a:rPr sz="540" b="0" i="0">
+                <a:solidFill>
+                  <a:srgbClr val="6B727C"/>
+                </a:solidFill>
+                <a:latin typeface="Helvetica"/>
+              </a:rPr>
+              <a:t>0.25</a:t>
+            </a:r>
+          </a:p>
+        </p:txBody>
+      </p:sp>
+      <p:cxnSp>
+        <p:nvCxnSpPr>
+          <p:cNvPr id="10" name="Connector 9"/>
+          <p:cNvCxnSpPr/>
+          <p:nvPr/>
+        </p:nvCxnSpPr>
+        <p:spPr>
+          <a:xfrm>
+            <a:off x="196850" y="381000"/>
+            <a:ext cx="31750" cy="0"/>
+          </a:xfrm>
+          <a:prstGeom prst="line">
+            <a:avLst/>
+          </a:prstGeom>
+          <a:ln w="7620">
+            <a:solidFill>
+              <a:srgbClr val="1C1E23"/>
+            </a:solidFill>
+          </a:ln>
+        </p:spPr>
+        <p:style>
+          <a:lnRef idx="2">
+            <a:schemeClr val="accent1"/>
+          </a:lnRef>
+          <a:fillRef idx="0">
+            <a:schemeClr val="accent1"/>
+          </a:fillRef>
+          <a:effectRef idx="1">
+            <a:schemeClr val="accent1"/>
+          </a:effectRef>
+          <a:fontRef idx="minor">
+            <a:schemeClr val="tx1"/>
+          </a:fontRef>
+        </p:style>
+      </p:cxnSp>
+      <p:sp>
+        <p:nvSpPr>
+          <p:cNvPr id="11" name="TextBox 10"/>
+          <p:cNvSpPr txBox="1"/>
+          <p:nvPr/>
+        </p:nvSpPr>
+        <p:spPr>
+          <a:xfrm>
+            <a:off x="-1341120" y="312547"/>
+            <a:ext cx="3048000" cy="164592"/>
+          </a:xfrm>
+          <a:prstGeom prst="rect">
+            <a:avLst/>
+          </a:prstGeom>
+          <a:noFill/>
+        </p:spPr>
+        <p:txBody>
+          <a:bodyPr wrap="none" lIns="0" rIns="0" tIns="0" bIns="0" anchor="ctr">
+            <a:spAutoFit/>
+          </a:bodyPr>
+          <a:lstStyle/>
+          <a:p>
+            <a:pPr algn="r"/>
+            <a:r>
+              <a:rPr sz="540" b="0" i="0">
+                <a:solidFill>
+                  <a:srgbClr val="6B727C"/>
+                </a:solidFill>
+                <a:latin typeface="Helvetica"/>
+              </a:rPr>
+              <a:t>0.50</a:t>
+            </a:r>
+          </a:p>
+        </p:txBody>
+      </p:sp>
+      <p:cxnSp>
+        <p:nvCxnSpPr>
+          <p:cNvPr id="12" name="Connector 11"/>
+          <p:cNvCxnSpPr/>
+          <p:nvPr/>
+        </p:nvCxnSpPr>
+        <p:spPr>
+          <a:xfrm>
+            <a:off x="363220" y="1524000"/>
+            <a:ext cx="0" cy="31750"/>
+          </a:xfrm>
+          <a:prstGeom prst="line">
+            <a:avLst/>
+          </a:prstGeom>
+          <a:ln w="7620">
+            <a:solidFill>
+              <a:srgbClr val="1C1E23"/>
+            </a:solidFill>
+          </a:ln>
+        </p:spPr>
+        <p:style>
+          <a:lnRef idx="2">
+            <a:schemeClr val="accent1"/>
+          </a:lnRef>
+          <a:fillRef idx="0">
+            <a:schemeClr val="accent1"/>
+          </a:fillRef>
+          <a:effectRef idx="1">
+            <a:schemeClr val="accent1"/>
+          </a:effectRef>
+          <a:fontRef idx="minor">
+            <a:schemeClr val="tx1"/>
+          </a:fontRef>
+        </p:style>
+      </p:cxnSp>
+      <p:sp>
+        <p:nvSpPr>
+          <p:cNvPr id="13" name="TextBox 12"/>
+          <p:cNvSpPr txBox="1"/>
+          <p:nvPr/>
+        </p:nvSpPr>
+        <p:spPr>
+          <a:xfrm>
+            <a:off x="-1160780" y="1556004"/>
+            <a:ext cx="3048000" cy="146304"/>
+          </a:xfrm>
+          <a:prstGeom prst="rect">
+            <a:avLst/>
+          </a:prstGeom>
+          <a:noFill/>
+        </p:spPr>
+        <p:txBody>
+          <a:bodyPr wrap="none" lIns="0" rIns="0" tIns="0" bIns="0" anchor="ctr">
+            <a:spAutoFit/>
+          </a:bodyPr>
+          <a:lstStyle/>
+          <a:p>
+            <a:pPr algn="ctr"/>
+            <a:r>
+              <a:rPr sz="480" b="0" i="0">
+                <a:solidFill>
+                  <a:srgbClr val="6B727C"/>
+                </a:solidFill>
+                <a:latin typeface="Helvetica"/>
+              </a:rPr>
+              <a:t>KEEP</a:t>
+            </a:r>
+          </a:p>
+        </p:txBody>
+      </p:sp>
+      <p:cxnSp>
+        <p:nvCxnSpPr>
+          <p:cNvPr id="14" name="Connector 13"/>
+          <p:cNvCxnSpPr/>
+          <p:nvPr/>
+        </p:nvCxnSpPr>
+        <p:spPr>
+          <a:xfrm>
+            <a:off x="632460" y="1524000"/>
+            <a:ext cx="0" cy="31750"/>
+          </a:xfrm>
+          <a:prstGeom prst="line">
+            <a:avLst/>
+          </a:prstGeom>
+          <a:ln w="7620">
+            <a:solidFill>
+              <a:srgbClr val="1C1E23"/>
+            </a:solidFill>
+          </a:ln>
+        </p:spPr>
+        <p:style>
+          <a:lnRef idx="2">
+            <a:schemeClr val="accent1"/>
+          </a:lnRef>
+          <a:fillRef idx="0">
+            <a:schemeClr val="accent1"/>
+          </a:fillRef>
+          <a:effectRef idx="1">
+            <a:schemeClr val="accent1"/>
+          </a:effectRef>
+          <a:fontRef idx="minor">
+            <a:schemeClr val="tx1"/>
+          </a:fontRef>
+        </p:style>
+      </p:cxnSp>
+      <p:sp>
+        <p:nvSpPr>
+          <p:cNvPr id="15" name="TextBox 14"/>
+          <p:cNvSpPr txBox="1"/>
+          <p:nvPr/>
+        </p:nvSpPr>
+        <p:spPr>
+          <a:xfrm>
+            <a:off x="-891540" y="1556004"/>
+            <a:ext cx="3048000" cy="146304"/>
+          </a:xfrm>
+          <a:prstGeom prst="rect">
+            <a:avLst/>
+          </a:prstGeom>
+          <a:noFill/>
+        </p:spPr>
+        <p:txBody>
+          <a:bodyPr wrap="none" lIns="0" rIns="0" tIns="0" bIns="0" anchor="ctr">
+            <a:spAutoFit/>
+          </a:bodyPr>
+          <a:lstStyle/>
+          <a:p>
+            <a:pPr algn="ctr"/>
+            <a:r>
+              <a:rPr sz="480" b="0" i="0">
+                <a:solidFill>
+                  <a:srgbClr val="6B727C"/>
+                </a:solidFill>
+                <a:latin typeface="Helvetica"/>
+              </a:rPr>
+              <a:t>FFILL</a:t>
+            </a:r>
+          </a:p>
+        </p:txBody>
+      </p:sp>
+      <p:cxnSp>
+        <p:nvCxnSpPr>
+          <p:cNvPr id="16" name="Connector 15"/>
+          <p:cNvCxnSpPr/>
+          <p:nvPr/>
+        </p:nvCxnSpPr>
+        <p:spPr>
+          <a:xfrm>
+            <a:off x="901700" y="1524000"/>
+            <a:ext cx="0" cy="31750"/>
+          </a:xfrm>
+          <a:prstGeom prst="line">
+            <a:avLst/>
+          </a:prstGeom>
+          <a:ln w="7620">
+            <a:solidFill>
+              <a:srgbClr val="1C1E23"/>
+            </a:solidFill>
+          </a:ln>
+        </p:spPr>
+        <p:style>
+          <a:lnRef idx="2">
+            <a:schemeClr val="accent1"/>
+          </a:lnRef>
+          <a:fillRef idx="0">
+            <a:schemeClr val="accent1"/>
+          </a:fillRef>
+          <a:effectRef idx="1">
+            <a:schemeClr val="accent1"/>
+          </a:effectRef>
+          <a:fontRef idx="minor">
+            <a:schemeClr val="tx1"/>
+          </a:fontRef>
+        </p:style>
+      </p:cxnSp>
+      <p:sp>
+        <p:nvSpPr>
+          <p:cNvPr id="17" name="TextBox 16"/>
+          <p:cNvSpPr txBox="1"/>
+          <p:nvPr/>
+        </p:nvSpPr>
+        <p:spPr>
+          <a:xfrm>
+            <a:off x="-622300" y="1556004"/>
+            <a:ext cx="3048000" cy="146304"/>
+          </a:xfrm>
+          <a:prstGeom prst="rect">
+            <a:avLst/>
+          </a:prstGeom>
+          <a:noFill/>
+        </p:spPr>
+        <p:txBody>
+          <a:bodyPr wrap="none" lIns="0" rIns="0" tIns="0" bIns="0" anchor="ctr">
+            <a:spAutoFit/>
+          </a:bodyPr>
+          <a:lstStyle/>
+          <a:p>
+            <a:pPr algn="ctr"/>
+            <a:r>
+              <a:rPr sz="480" b="0" i="0">
+                <a:solidFill>
+                  <a:srgbClr val="6B727C"/>
+                </a:solidFill>
+                <a:latin typeface="Helvetica"/>
+              </a:rPr>
+              <a:t>S-ICL</a:t>
+            </a:r>
+          </a:p>
+        </p:txBody>
+      </p:sp>
+      <p:cxnSp>
+        <p:nvCxnSpPr>
+          <p:cNvPr id="18" name="Connector 17"/>
+          <p:cNvCxnSpPr/>
+          <p:nvPr/>
+        </p:nvCxnSpPr>
+        <p:spPr>
+          <a:xfrm>
+            <a:off x="1170940" y="1524000"/>
+            <a:ext cx="0" cy="31750"/>
+          </a:xfrm>
+          <a:prstGeom prst="line">
+            <a:avLst/>
+          </a:prstGeom>
+          <a:ln w="7620">
+            <a:solidFill>
+              <a:srgbClr val="1C1E23"/>
+            </a:solidFill>
+          </a:ln>
+        </p:spPr>
+        <p:style>
+          <a:lnRef idx="2">
+            <a:schemeClr val="accent1"/>
+          </a:lnRef>
+          <a:fillRef idx="0">
+            <a:schemeClr val="accent1"/>
+          </a:fillRef>
+          <a:effectRef idx="1">
+            <a:schemeClr val="accent1"/>
+          </a:effectRef>
+          <a:fontRef idx="minor">
+            <a:schemeClr val="tx1"/>
+          </a:fontRef>
+        </p:style>
+      </p:cxnSp>
+      <p:sp>
+        <p:nvSpPr>
+          <p:cNvPr id="19" name="TextBox 18"/>
+          <p:cNvSpPr txBox="1"/>
+          <p:nvPr/>
+        </p:nvSpPr>
+        <p:spPr>
+          <a:xfrm>
+            <a:off x="-353059" y="1556004"/>
+            <a:ext cx="3048000" cy="146304"/>
+          </a:xfrm>
+          <a:prstGeom prst="rect">
+            <a:avLst/>
+          </a:prstGeom>
+          <a:noFill/>
+        </p:spPr>
+        <p:txBody>
+          <a:bodyPr wrap="none" lIns="0" rIns="0" tIns="0" bIns="0" anchor="ctr">
+            <a:spAutoFit/>
+          </a:bodyPr>
+          <a:lstStyle/>
+          <a:p>
+            <a:pPr algn="ctr"/>
+            <a:r>
+              <a:rPr sz="480" b="0" i="0">
+                <a:solidFill>
+                  <a:srgbClr val="6B727C"/>
+                </a:solidFill>
+                <a:latin typeface="Helvetica"/>
+              </a:rPr>
+              <a:t>M-ICL</a:t>
+            </a:r>
+          </a:p>
+        </p:txBody>
+      </p:sp>
+      <p:cxnSp>
+        <p:nvCxnSpPr>
+          <p:cNvPr id="20" name="Connector 19"/>
+          <p:cNvCxnSpPr/>
+          <p:nvPr/>
+        </p:nvCxnSpPr>
+        <p:spPr>
+          <a:xfrm>
+            <a:off x="1440180" y="1524000"/>
+            <a:ext cx="0" cy="31750"/>
+          </a:xfrm>
+          <a:prstGeom prst="line">
+            <a:avLst/>
+          </a:prstGeom>
+          <a:ln w="7620">
+            <a:solidFill>
+              <a:srgbClr val="1C1E23"/>
+            </a:solidFill>
+          </a:ln>
+        </p:spPr>
+        <p:style>
+          <a:lnRef idx="2">
+            <a:schemeClr val="accent1"/>
+          </a:lnRef>
+          <a:fillRef idx="0">
+            <a:schemeClr val="accent1"/>
+          </a:fillRef>
+          <a:effectRef idx="1">
+            <a:schemeClr val="accent1"/>
+          </a:effectRef>
+          <a:fontRef idx="minor">
+            <a:schemeClr val="tx1"/>
+          </a:fontRef>
+        </p:style>
+      </p:cxnSp>
+      <p:sp>
+        <p:nvSpPr>
+          <p:cNvPr id="21" name="TextBox 20"/>
+          <p:cNvSpPr txBox="1"/>
+          <p:nvPr/>
+        </p:nvSpPr>
+        <p:spPr>
+          <a:xfrm>
+            <a:off x="-83820" y="1556004"/>
+            <a:ext cx="3048000" cy="146304"/>
+          </a:xfrm>
+          <a:prstGeom prst="rect">
+            <a:avLst/>
+          </a:prstGeom>
+          <a:noFill/>
+        </p:spPr>
+        <p:txBody>
+          <a:bodyPr wrap="none" lIns="0" rIns="0" tIns="0" bIns="0" anchor="ctr">
+            <a:spAutoFit/>
+          </a:bodyPr>
+          <a:lstStyle/>
+          <a:p>
+            <a:pPr algn="ctr"/>
+            <a:r>
+              <a:rPr sz="480" b="0" i="0">
+                <a:solidFill>
+                  <a:srgbClr val="6B727C"/>
+                </a:solidFill>
+                <a:latin typeface="Helvetica"/>
+              </a:rPr>
+              <a:t>RIDGE</a:t>
+            </a:r>
+          </a:p>
+        </p:txBody>
+      </p:sp>
+      <p:sp>
+        <p:nvSpPr>
+          <p:cNvPr id="22" name="Rectangle 21"/>
+          <p:cNvSpPr/>
+          <p:nvPr/>
+        </p:nvSpPr>
+        <p:spPr>
+          <a:xfrm>
+            <a:off x="304800" y="660400"/>
+            <a:ext cx="1193800" cy="508000"/>
+          </a:xfrm>
+          <a:prstGeom prst="rect">
+            <a:avLst/>
+          </a:prstGeom>
+          <a:noFill/>
+          <a:ln w="7620">
+            <a:solidFill>
+              <a:srgbClr val="9EA5AD"/>
             </a:solidFill>
           </a:ln>
           <a:effectLst/>
@@ -3208,348 +3834,13 @@
       </p:sp>
       <p:sp>
         <p:nvSpPr>
-          <p:cNvPr id="5" name="Freeform 4"/>
-          <p:cNvSpPr/>
-          <p:nvPr/>
-        </p:nvSpPr>
-        <p:spPr>
-          <a:xfrm>
-            <a:off x="114300" y="471092"/>
-            <a:ext cx="1498600" cy="177841"/>
-          </a:xfrm>
-          <a:custGeom>
-            <a:avLst/>
-            <a:gdLst/>
-            <a:ahLst/>
-            <a:cxnLst/>
-            <a:rect l="l" t="t" r="r" b="b"/>
-            <a:pathLst>
-              <a:path w="1498600" h="177841">
-                <a:moveTo>
-                  <a:pt x="0" y="87708"/>
-                </a:moveTo>
-                <a:lnTo>
-                  <a:pt x="14986" y="64352"/>
-                </a:lnTo>
-                <a:lnTo>
-                  <a:pt x="29972" y="43245"/>
-                </a:lnTo>
-                <a:lnTo>
-                  <a:pt x="44958" y="26259"/>
-                </a:lnTo>
-                <a:lnTo>
-                  <a:pt x="59944" y="14586"/>
-                </a:lnTo>
-                <a:lnTo>
-                  <a:pt x="74930" y="8552"/>
-                </a:lnTo>
-                <a:lnTo>
-                  <a:pt x="89915" y="7597"/>
-                </a:lnTo>
-                <a:lnTo>
-                  <a:pt x="104902" y="10413"/>
-                </a:lnTo>
-                <a:lnTo>
-                  <a:pt x="119887" y="15215"/>
-                </a:lnTo>
-                <a:lnTo>
-                  <a:pt x="134873" y="20104"/>
-                </a:lnTo>
-                <a:lnTo>
-                  <a:pt x="149860" y="23436"/>
-                </a:lnTo>
-                <a:lnTo>
-                  <a:pt x="164846" y="24145"/>
-                </a:lnTo>
-                <a:lnTo>
-                  <a:pt x="179832" y="21951"/>
-                </a:lnTo>
-                <a:lnTo>
-                  <a:pt x="194818" y="17412"/>
-                </a:lnTo>
-                <a:lnTo>
-                  <a:pt x="209804" y="11823"/>
-                </a:lnTo>
-                <a:lnTo>
-                  <a:pt x="224790" y="6960"/>
-                </a:lnTo>
-                <a:lnTo>
-                  <a:pt x="239776" y="4736"/>
-                </a:lnTo>
-                <a:lnTo>
-                  <a:pt x="254762" y="6827"/>
-                </a:lnTo>
-                <a:lnTo>
-                  <a:pt x="269748" y="14332"/>
-                </a:lnTo>
-                <a:lnTo>
-                  <a:pt x="284734" y="27539"/>
-                </a:lnTo>
-                <a:lnTo>
-                  <a:pt x="299720" y="45838"/>
-                </a:lnTo>
-                <a:lnTo>
-                  <a:pt x="314706" y="67793"/>
-                </a:lnTo>
-                <a:lnTo>
-                  <a:pt x="329692" y="91375"/>
-                </a:lnTo>
-                <a:lnTo>
-                  <a:pt x="344678" y="114294"/>
-                </a:lnTo>
-                <a:lnTo>
-                  <a:pt x="359664" y="134381"/>
-                </a:lnTo>
-                <a:lnTo>
-                  <a:pt x="374650" y="149953"/>
-                </a:lnTo>
-                <a:lnTo>
-                  <a:pt x="389636" y="160081"/>
-                </a:lnTo>
-                <a:lnTo>
-                  <a:pt x="404622" y="164725"/>
-                </a:lnTo>
-                <a:lnTo>
-                  <a:pt x="419608" y="164702"/>
-                </a:lnTo>
-                <a:lnTo>
-                  <a:pt x="434594" y="161500"/>
-                </a:lnTo>
-                <a:lnTo>
-                  <a:pt x="779272" y="21439"/>
-                </a:lnTo>
-                <a:lnTo>
-                  <a:pt x="794258" y="24395"/>
-                </a:lnTo>
-                <a:lnTo>
-                  <a:pt x="809244" y="24985"/>
-                </a:lnTo>
-                <a:lnTo>
-                  <a:pt x="824230" y="22658"/>
-                </a:lnTo>
-                <a:lnTo>
-                  <a:pt x="839216" y="17705"/>
-                </a:lnTo>
-                <a:lnTo>
-                  <a:pt x="854201" y="11204"/>
-                </a:lnTo>
-                <a:lnTo>
-                  <a:pt x="869188" y="4817"/>
-                </a:lnTo>
-                <a:lnTo>
-                  <a:pt x="884173" y="475"/>
-                </a:lnTo>
-                <a:lnTo>
-                  <a:pt x="899160" y="0"/>
-                </a:lnTo>
-                <a:lnTo>
-                  <a:pt x="914146" y="4745"/>
-                </a:lnTo>
-                <a:lnTo>
-                  <a:pt x="929132" y="15320"/>
-                </a:lnTo>
-                <a:lnTo>
-                  <a:pt x="944118" y="31444"/>
-                </a:lnTo>
-                <a:lnTo>
-                  <a:pt x="959104" y="51967"/>
-                </a:lnTo>
-                <a:lnTo>
-                  <a:pt x="974090" y="75043"/>
-                </a:lnTo>
-                <a:lnTo>
-                  <a:pt x="989076" y="98432"/>
-                </a:lnTo>
-                <a:lnTo>
-                  <a:pt x="1004062" y="119882"/>
-                </a:lnTo>
-                <a:lnTo>
-                  <a:pt x="1019048" y="137498"/>
-                </a:lnTo>
-                <a:lnTo>
-                  <a:pt x="1034033" y="150054"/>
-                </a:lnTo>
-                <a:lnTo>
-                  <a:pt x="1049020" y="157182"/>
-                </a:lnTo>
-                <a:lnTo>
-                  <a:pt x="1064006" y="159396"/>
-                </a:lnTo>
-                <a:lnTo>
-                  <a:pt x="1078992" y="157962"/>
-                </a:lnTo>
-                <a:lnTo>
-                  <a:pt x="1093978" y="154629"/>
-                </a:lnTo>
-                <a:lnTo>
-                  <a:pt x="1108964" y="151269"/>
-                </a:lnTo>
-                <a:lnTo>
-                  <a:pt x="1123950" y="149507"/>
-                </a:lnTo>
-                <a:lnTo>
-                  <a:pt x="1138936" y="150398"/>
-                </a:lnTo>
-                <a:lnTo>
-                  <a:pt x="1153922" y="154214"/>
-                </a:lnTo>
-                <a:lnTo>
-                  <a:pt x="1168908" y="160385"/>
-                </a:lnTo>
-                <a:lnTo>
-                  <a:pt x="1183894" y="167605"/>
-                </a:lnTo>
-                <a:lnTo>
-                  <a:pt x="1198880" y="174072"/>
-                </a:lnTo>
-                <a:lnTo>
-                  <a:pt x="1213866" y="177841"/>
-                </a:lnTo>
-                <a:lnTo>
-                  <a:pt x="1228852" y="177193"/>
-                </a:lnTo>
-                <a:lnTo>
-                  <a:pt x="1243838" y="170982"/>
-                </a:lnTo>
-                <a:lnTo>
-                  <a:pt x="1258823" y="158868"/>
-                </a:lnTo>
-                <a:lnTo>
-                  <a:pt x="1273810" y="141418"/>
-                </a:lnTo>
-                <a:lnTo>
-                  <a:pt x="1288796" y="120027"/>
-                </a:lnTo>
-                <a:lnTo>
-                  <a:pt x="1303782" y="96703"/>
-                </a:lnTo>
-                <a:lnTo>
-                  <a:pt x="1318768" y="73728"/>
-                </a:lnTo>
-                <a:lnTo>
-                  <a:pt x="1333754" y="53280"/>
-                </a:lnTo>
-                <a:lnTo>
-                  <a:pt x="1348740" y="37067"/>
-                </a:lnTo>
-                <a:lnTo>
-                  <a:pt x="1363726" y="26054"/>
-                </a:lnTo>
-                <a:lnTo>
-                  <a:pt x="1378712" y="20324"/>
-                </a:lnTo>
-                <a:lnTo>
-                  <a:pt x="1393698" y="19102"/>
-                </a:lnTo>
-                <a:lnTo>
-                  <a:pt x="1408683" y="20941"/>
-                </a:lnTo>
-                <a:lnTo>
-                  <a:pt x="1423670" y="24018"/>
-                </a:lnTo>
-                <a:lnTo>
-                  <a:pt x="1438656" y="26510"/>
-                </a:lnTo>
-                <a:lnTo>
-                  <a:pt x="1453642" y="26957"/>
-                </a:lnTo>
-                <a:lnTo>
-                  <a:pt x="1468628" y="24550"/>
-                </a:lnTo>
-                <a:lnTo>
-                  <a:pt x="1483614" y="19303"/>
-                </a:lnTo>
-                <a:lnTo>
-                  <a:pt x="1498600" y="12054"/>
-                </a:lnTo>
-              </a:path>
-            </a:pathLst>
-          </a:custGeom>
-          <a:noFill/>
-          <a:ln w="11430">
-            <a:solidFill>
-              <a:srgbClr val="1C1E23"/>
-            </a:solidFill>
-          </a:ln>
-          <a:effectLst/>
-        </p:spPr>
-        <p:style>
-          <a:lnRef idx="1">
-            <a:schemeClr val="accent1"/>
-          </a:lnRef>
-          <a:fillRef idx="3">
-            <a:schemeClr val="accent1"/>
-          </a:fillRef>
-          <a:effectRef idx="2">
-            <a:schemeClr val="accent1"/>
-          </a:effectRef>
-          <a:fontRef idx="minor">
-            <a:schemeClr val="lt1"/>
-          </a:fontRef>
-        </p:style>
-        <p:txBody>
-          <a:bodyPr rtlCol="0" anchor="ctr"/>
-          <a:lstStyle/>
-          <a:p>
-            <a:pPr algn="ctr"/>
-          </a:p>
-        </p:txBody>
-      </p:sp>
-      <p:sp>
-        <p:nvSpPr>
-          <p:cNvPr id="6" name="Rectangle 5"/>
-          <p:cNvSpPr/>
-          <p:nvPr/>
-        </p:nvSpPr>
-        <p:spPr>
-          <a:xfrm>
-            <a:off x="558800" y="393700"/>
-            <a:ext cx="330200" cy="254000"/>
-          </a:xfrm>
-          <a:prstGeom prst="rect">
-            <a:avLst/>
-          </a:prstGeom>
-          <a:solidFill>
-            <a:srgbClr val="FCEAEA"/>
-          </a:solidFill>
-          <a:ln w="6350">
-            <a:solidFill>
-              <a:srgbClr val="AD2B2B"/>
-            </a:solidFill>
-          </a:ln>
-          <a:effectLst/>
-        </p:spPr>
-        <p:style>
-          <a:lnRef idx="1">
-            <a:schemeClr val="accent1"/>
-          </a:lnRef>
-          <a:fillRef idx="3">
-            <a:schemeClr val="accent1"/>
-          </a:fillRef>
-          <a:effectRef idx="2">
-            <a:schemeClr val="accent1"/>
-          </a:effectRef>
-          <a:fontRef idx="minor">
-            <a:schemeClr val="lt1"/>
-          </a:fontRef>
-        </p:style>
-        <p:txBody>
-          <a:bodyPr rtlCol="0" anchor="ctr"/>
-          <a:lstStyle/>
-          <a:p>
-            <a:pPr algn="ctr"/>
-          </a:p>
-        </p:txBody>
-      </p:sp>
-      <p:sp>
-        <p:nvSpPr>
-          <p:cNvPr id="7" name="TextBox 6"/>
+          <p:cNvPr id="23" name="TextBox 22"/>
           <p:cNvSpPr txBox="1"/>
           <p:nvPr/>
         </p:nvSpPr>
         <p:spPr>
           <a:xfrm>
-            <a:off x="-800100" y="454025"/>
+            <a:off x="-622300" y="777875"/>
             <a:ext cx="3048000" cy="152400"/>
           </a:xfrm>
           <a:prstGeom prst="rect">
@@ -3567,25 +3858,25 @@
             <a:r>
               <a:rPr sz="500" b="0" i="0">
                 <a:solidFill>
-                  <a:srgbClr val="AD2B2B"/>
+                  <a:srgbClr val="6B727C"/>
                 </a:solidFill>
                 <a:latin typeface="Helvetica"/>
               </a:rPr>
-              <a:t>gap</a:t>
-            </a:r>
-          </a:p>
-        </p:txBody>
-      </p:sp>
-      <p:sp>
-        <p:nvSpPr>
-          <p:cNvPr id="8" name="TextBox 7"/>
+              <a:t>measured from the</a:t>
+            </a:r>
+          </a:p>
+        </p:txBody>
+      </p:sp>
+      <p:sp>
+        <p:nvSpPr>
+          <p:cNvPr id="24" name="TextBox 23"/>
           <p:cNvSpPr txBox="1"/>
           <p:nvPr/>
         </p:nvSpPr>
         <p:spPr>
           <a:xfrm>
-            <a:off x="-660400" y="713359"/>
-            <a:ext cx="3048000" cy="176784"/>
+            <a:off x="-622300" y="866775"/>
+            <a:ext cx="3048000" cy="152400"/>
           </a:xfrm>
           <a:prstGeom prst="rect">
             <a:avLst/>
@@ -3600,27 +3891,27 @@
           <a:p>
             <a:pPr algn="ctr"/>
             <a:r>
-              <a:rPr sz="580" b="0" i="0">
-                <a:solidFill>
-                  <a:srgbClr val="19704F"/>
+              <a:rPr sz="500" b="0" i="0">
+                <a:solidFill>
+                  <a:srgbClr val="6B727C"/>
                 </a:solidFill>
                 <a:latin typeface="Helvetica"/>
               </a:rPr>
-              <a:t>Episode A: KEEP is best</a:t>
-            </a:r>
-          </a:p>
-        </p:txBody>
-      </p:sp>
-      <p:sp>
-        <p:nvSpPr>
-          <p:cNvPr id="9" name="TextBox 8"/>
+              <a:t>evaluation episodes</a:t>
+            </a:r>
+          </a:p>
+        </p:txBody>
+      </p:sp>
+      <p:sp>
+        <p:nvSpPr>
+          <p:cNvPr id="25" name="TextBox 24"/>
           <p:cNvSpPr txBox="1"/>
           <p:nvPr/>
         </p:nvSpPr>
         <p:spPr>
           <a:xfrm>
-            <a:off x="-660400" y="818896"/>
-            <a:ext cx="3048000" cy="158496"/>
+            <a:off x="-622300" y="955675"/>
+            <a:ext cx="3048000" cy="152400"/>
           </a:xfrm>
           <a:prstGeom prst="rect">
             <a:avLst/>
@@ -3635,410 +3926,27 @@
           <a:p>
             <a:pPr algn="ctr"/>
             <a:r>
-              <a:rPr sz="520" b="0" i="0">
+              <a:rPr sz="500" b="0" i="0">
                 <a:solidFill>
                   <a:srgbClr val="6B727C"/>
                 </a:solidFill>
                 <a:latin typeface="Helvetica"/>
               </a:rPr>
-              <a:t>same repair, different utility</a:t>
-            </a:r>
-          </a:p>
-        </p:txBody>
-      </p:sp>
-      <p:sp>
-        <p:nvSpPr>
-          <p:cNvPr id="10" name="Rounded Rectangle 9"/>
-          <p:cNvSpPr/>
-          <p:nvPr/>
-        </p:nvSpPr>
-        <p:spPr>
-          <a:xfrm>
-            <a:off x="50800" y="927100"/>
-            <a:ext cx="1625600" cy="381000"/>
-          </a:xfrm>
-          <a:prstGeom prst="roundRect">
-            <a:avLst>
-              <a:gd name="adj" fmla="val 781"/>
-            </a:avLst>
-          </a:prstGeom>
-          <a:solidFill>
-            <a:srgbClr val="FFFFFF"/>
-          </a:solidFill>
-          <a:ln w="7620">
-            <a:solidFill>
-              <a:srgbClr val="CCCED3"/>
-            </a:solidFill>
-          </a:ln>
-          <a:effectLst/>
-        </p:spPr>
-        <p:style>
-          <a:lnRef idx="1">
-            <a:schemeClr val="accent1"/>
-          </a:lnRef>
-          <a:fillRef idx="3">
-            <a:schemeClr val="accent1"/>
-          </a:fillRef>
-          <a:effectRef idx="2">
-            <a:schemeClr val="accent1"/>
-          </a:effectRef>
-          <a:fontRef idx="minor">
-            <a:schemeClr val="lt1"/>
-          </a:fontRef>
-        </p:style>
-        <p:txBody>
-          <a:bodyPr rtlCol="0" anchor="ctr"/>
-          <a:lstStyle/>
-          <a:p>
-            <a:pPr algn="ctr"/>
-          </a:p>
-        </p:txBody>
-      </p:sp>
-      <p:sp>
-        <p:nvSpPr>
-          <p:cNvPr id="11" name="Freeform 10"/>
-          <p:cNvSpPr/>
-          <p:nvPr/>
-        </p:nvSpPr>
-        <p:spPr>
-          <a:xfrm>
-            <a:off x="114300" y="1067992"/>
-            <a:ext cx="1498600" cy="177841"/>
-          </a:xfrm>
-          <a:custGeom>
-            <a:avLst/>
-            <a:gdLst/>
-            <a:ahLst/>
-            <a:cxnLst/>
-            <a:rect l="l" t="t" r="r" b="b"/>
-            <a:pathLst>
-              <a:path w="1498600" h="177841">
-                <a:moveTo>
-                  <a:pt x="0" y="87708"/>
-                </a:moveTo>
-                <a:lnTo>
-                  <a:pt x="14986" y="64352"/>
-                </a:lnTo>
-                <a:lnTo>
-                  <a:pt x="29972" y="43245"/>
-                </a:lnTo>
-                <a:lnTo>
-                  <a:pt x="44958" y="26259"/>
-                </a:lnTo>
-                <a:lnTo>
-                  <a:pt x="59944" y="14586"/>
-                </a:lnTo>
-                <a:lnTo>
-                  <a:pt x="74930" y="8552"/>
-                </a:lnTo>
-                <a:lnTo>
-                  <a:pt x="89915" y="7597"/>
-                </a:lnTo>
-                <a:lnTo>
-                  <a:pt x="104902" y="10413"/>
-                </a:lnTo>
-                <a:lnTo>
-                  <a:pt x="119887" y="15215"/>
-                </a:lnTo>
-                <a:lnTo>
-                  <a:pt x="134873" y="20104"/>
-                </a:lnTo>
-                <a:lnTo>
-                  <a:pt x="149860" y="23436"/>
-                </a:lnTo>
-                <a:lnTo>
-                  <a:pt x="164846" y="24145"/>
-                </a:lnTo>
-                <a:lnTo>
-                  <a:pt x="179832" y="21951"/>
-                </a:lnTo>
-                <a:lnTo>
-                  <a:pt x="194818" y="17412"/>
-                </a:lnTo>
-                <a:lnTo>
-                  <a:pt x="209804" y="11823"/>
-                </a:lnTo>
-                <a:lnTo>
-                  <a:pt x="224790" y="6960"/>
-                </a:lnTo>
-                <a:lnTo>
-                  <a:pt x="239776" y="4736"/>
-                </a:lnTo>
-                <a:lnTo>
-                  <a:pt x="254762" y="6827"/>
-                </a:lnTo>
-                <a:lnTo>
-                  <a:pt x="269748" y="14332"/>
-                </a:lnTo>
-                <a:lnTo>
-                  <a:pt x="284734" y="27539"/>
-                </a:lnTo>
-                <a:lnTo>
-                  <a:pt x="299720" y="45838"/>
-                </a:lnTo>
-                <a:lnTo>
-                  <a:pt x="314706" y="67793"/>
-                </a:lnTo>
-                <a:lnTo>
-                  <a:pt x="329692" y="91375"/>
-                </a:lnTo>
-                <a:lnTo>
-                  <a:pt x="344678" y="114294"/>
-                </a:lnTo>
-                <a:lnTo>
-                  <a:pt x="359664" y="134381"/>
-                </a:lnTo>
-                <a:lnTo>
-                  <a:pt x="374650" y="149953"/>
-                </a:lnTo>
-                <a:lnTo>
-                  <a:pt x="389636" y="160081"/>
-                </a:lnTo>
-                <a:lnTo>
-                  <a:pt x="404622" y="164725"/>
-                </a:lnTo>
-                <a:lnTo>
-                  <a:pt x="419608" y="164702"/>
-                </a:lnTo>
-                <a:lnTo>
-                  <a:pt x="434594" y="161500"/>
-                </a:lnTo>
-                <a:lnTo>
-                  <a:pt x="779272" y="21439"/>
-                </a:lnTo>
-                <a:lnTo>
-                  <a:pt x="794258" y="24395"/>
-                </a:lnTo>
-                <a:lnTo>
-                  <a:pt x="809244" y="24985"/>
-                </a:lnTo>
-                <a:lnTo>
-                  <a:pt x="824230" y="22658"/>
-                </a:lnTo>
-                <a:lnTo>
-                  <a:pt x="839216" y="17705"/>
-                </a:lnTo>
-                <a:lnTo>
-                  <a:pt x="854201" y="11204"/>
-                </a:lnTo>
-                <a:lnTo>
-                  <a:pt x="869188" y="4817"/>
-                </a:lnTo>
-                <a:lnTo>
-                  <a:pt x="884173" y="475"/>
-                </a:lnTo>
-                <a:lnTo>
-                  <a:pt x="899160" y="0"/>
-                </a:lnTo>
-                <a:lnTo>
-                  <a:pt x="914146" y="4745"/>
-                </a:lnTo>
-                <a:lnTo>
-                  <a:pt x="929132" y="15320"/>
-                </a:lnTo>
-                <a:lnTo>
-                  <a:pt x="944118" y="31444"/>
-                </a:lnTo>
-                <a:lnTo>
-                  <a:pt x="959104" y="51967"/>
-                </a:lnTo>
-                <a:lnTo>
-                  <a:pt x="974090" y="75043"/>
-                </a:lnTo>
-                <a:lnTo>
-                  <a:pt x="989076" y="98432"/>
-                </a:lnTo>
-                <a:lnTo>
-                  <a:pt x="1004062" y="119882"/>
-                </a:lnTo>
-                <a:lnTo>
-                  <a:pt x="1019048" y="137498"/>
-                </a:lnTo>
-                <a:lnTo>
-                  <a:pt x="1034033" y="150054"/>
-                </a:lnTo>
-                <a:lnTo>
-                  <a:pt x="1049020" y="157182"/>
-                </a:lnTo>
-                <a:lnTo>
-                  <a:pt x="1064006" y="159396"/>
-                </a:lnTo>
-                <a:lnTo>
-                  <a:pt x="1078992" y="157962"/>
-                </a:lnTo>
-                <a:lnTo>
-                  <a:pt x="1093978" y="154629"/>
-                </a:lnTo>
-                <a:lnTo>
-                  <a:pt x="1108964" y="151269"/>
-                </a:lnTo>
-                <a:lnTo>
-                  <a:pt x="1123950" y="149507"/>
-                </a:lnTo>
-                <a:lnTo>
-                  <a:pt x="1138936" y="150398"/>
-                </a:lnTo>
-                <a:lnTo>
-                  <a:pt x="1153922" y="154214"/>
-                </a:lnTo>
-                <a:lnTo>
-                  <a:pt x="1168908" y="160385"/>
-                </a:lnTo>
-                <a:lnTo>
-                  <a:pt x="1183894" y="167605"/>
-                </a:lnTo>
-                <a:lnTo>
-                  <a:pt x="1198880" y="174072"/>
-                </a:lnTo>
-                <a:lnTo>
-                  <a:pt x="1213866" y="177841"/>
-                </a:lnTo>
-                <a:lnTo>
-                  <a:pt x="1228852" y="177193"/>
-                </a:lnTo>
-                <a:lnTo>
-                  <a:pt x="1243838" y="170982"/>
-                </a:lnTo>
-                <a:lnTo>
-                  <a:pt x="1258823" y="158868"/>
-                </a:lnTo>
-                <a:lnTo>
-                  <a:pt x="1273810" y="141418"/>
-                </a:lnTo>
-                <a:lnTo>
-                  <a:pt x="1288796" y="120027"/>
-                </a:lnTo>
-                <a:lnTo>
-                  <a:pt x="1303782" y="96703"/>
-                </a:lnTo>
-                <a:lnTo>
-                  <a:pt x="1318768" y="73728"/>
-                </a:lnTo>
-                <a:lnTo>
-                  <a:pt x="1333754" y="53280"/>
-                </a:lnTo>
-                <a:lnTo>
-                  <a:pt x="1348740" y="37067"/>
-                </a:lnTo>
-                <a:lnTo>
-                  <a:pt x="1363726" y="26054"/>
-                </a:lnTo>
-                <a:lnTo>
-                  <a:pt x="1378712" y="20324"/>
-                </a:lnTo>
-                <a:lnTo>
-                  <a:pt x="1393698" y="19102"/>
-                </a:lnTo>
-                <a:lnTo>
-                  <a:pt x="1408683" y="20941"/>
-                </a:lnTo>
-                <a:lnTo>
-                  <a:pt x="1423670" y="24018"/>
-                </a:lnTo>
-                <a:lnTo>
-                  <a:pt x="1438656" y="26510"/>
-                </a:lnTo>
-                <a:lnTo>
-                  <a:pt x="1453642" y="26957"/>
-                </a:lnTo>
-                <a:lnTo>
-                  <a:pt x="1468628" y="24550"/>
-                </a:lnTo>
-                <a:lnTo>
-                  <a:pt x="1483614" y="19303"/>
-                </a:lnTo>
-                <a:lnTo>
-                  <a:pt x="1498600" y="12054"/>
-                </a:lnTo>
-              </a:path>
-            </a:pathLst>
-          </a:custGeom>
-          <a:noFill/>
-          <a:ln w="11430">
-            <a:solidFill>
-              <a:srgbClr val="1C1E23"/>
-            </a:solidFill>
-          </a:ln>
-          <a:effectLst/>
-        </p:spPr>
-        <p:style>
-          <a:lnRef idx="1">
-            <a:schemeClr val="accent1"/>
-          </a:lnRef>
-          <a:fillRef idx="3">
-            <a:schemeClr val="accent1"/>
-          </a:fillRef>
-          <a:effectRef idx="2">
-            <a:schemeClr val="accent1"/>
-          </a:effectRef>
-          <a:fontRef idx="minor">
-            <a:schemeClr val="lt1"/>
-          </a:fontRef>
-        </p:style>
-        <p:txBody>
-          <a:bodyPr rtlCol="0" anchor="ctr"/>
-          <a:lstStyle/>
-          <a:p>
-            <a:pPr algn="ctr"/>
-          </a:p>
-        </p:txBody>
-      </p:sp>
-      <p:sp>
-        <p:nvSpPr>
-          <p:cNvPr id="12" name="Rectangle 11"/>
-          <p:cNvSpPr/>
-          <p:nvPr/>
-        </p:nvSpPr>
-        <p:spPr>
-          <a:xfrm>
-            <a:off x="558800" y="990600"/>
-            <a:ext cx="330200" cy="254000"/>
-          </a:xfrm>
-          <a:prstGeom prst="rect">
-            <a:avLst/>
-          </a:prstGeom>
-          <a:solidFill>
-            <a:srgbClr val="FCEAEA"/>
-          </a:solidFill>
-          <a:ln w="6350">
-            <a:solidFill>
-              <a:srgbClr val="AD2B2B"/>
-            </a:solidFill>
-          </a:ln>
-          <a:effectLst/>
-        </p:spPr>
-        <p:style>
-          <a:lnRef idx="1">
-            <a:schemeClr val="accent1"/>
-          </a:lnRef>
-          <a:fillRef idx="3">
-            <a:schemeClr val="accent1"/>
-          </a:fillRef>
-          <a:effectRef idx="2">
-            <a:schemeClr val="accent1"/>
-          </a:effectRef>
-          <a:fontRef idx="minor">
-            <a:schemeClr val="lt1"/>
-          </a:fontRef>
-        </p:style>
-        <p:txBody>
-          <a:bodyPr rtlCol="0" anchor="ctr"/>
-          <a:lstStyle/>
-          <a:p>
-            <a:pPr algn="ctr"/>
-          </a:p>
-        </p:txBody>
-      </p:sp>
-      <p:sp>
-        <p:nvSpPr>
-          <p:cNvPr id="13" name="TextBox 12"/>
+              <a:t>(Section 4.2)</a:t>
+            </a:r>
+          </a:p>
+        </p:txBody>
+      </p:sp>
+      <p:sp>
+        <p:nvSpPr>
+          <p:cNvPr id="26" name="TextBox 25"/>
           <p:cNvSpPr txBox="1"/>
           <p:nvPr/>
         </p:nvSpPr>
         <p:spPr>
           <a:xfrm>
-            <a:off x="-800100" y="1050925"/>
-            <a:ext cx="3048000" cy="152400"/>
+            <a:off x="-660400" y="1693989"/>
+            <a:ext cx="3048000" cy="149352"/>
           </a:xfrm>
           <a:prstGeom prst="rect">
             <a:avLst/>
@@ -4053,27 +3961,27 @@
           <a:p>
             <a:pPr algn="ctr"/>
             <a:r>
-              <a:rPr sz="500" b="0" i="0">
-                <a:solidFill>
-                  <a:srgbClr val="AD2B2B"/>
+              <a:rPr sz="490" b="0" i="0">
+                <a:solidFill>
+                  <a:srgbClr val="6B727C"/>
                 </a:solidFill>
                 <a:latin typeface="Helvetica"/>
               </a:rPr>
-              <a:t>gap</a:t>
-            </a:r>
-          </a:p>
-        </p:txBody>
-      </p:sp>
-      <p:sp>
-        <p:nvSpPr>
-          <p:cNvPr id="14" name="TextBox 13"/>
+              <a:t>share of episodes on which each action</a:t>
+            </a:r>
+          </a:p>
+        </p:txBody>
+      </p:sp>
+      <p:sp>
+        <p:nvSpPr>
+          <p:cNvPr id="27" name="TextBox 26"/>
           <p:cNvSpPr txBox="1"/>
           <p:nvPr/>
         </p:nvSpPr>
         <p:spPr>
           <a:xfrm>
-            <a:off x="-660400" y="1310259"/>
-            <a:ext cx="3048000" cy="176784"/>
+            <a:off x="-660400" y="1782889"/>
+            <a:ext cx="3048000" cy="149352"/>
           </a:xfrm>
           <a:prstGeom prst="rect">
             <a:avLst/>
@@ -4088,26 +3996,26 @@
           <a:p>
             <a:pPr algn="ctr"/>
             <a:r>
-              <a:rPr sz="580" b="0" i="0">
-                <a:solidFill>
-                  <a:srgbClr val="215499"/>
+              <a:rPr sz="490" b="0" i="0">
+                <a:solidFill>
+                  <a:srgbClr val="6B727C"/>
                 </a:solidFill>
                 <a:latin typeface="Helvetica"/>
               </a:rPr>
-              <a:t>Episode B: Single TS-ICL is best</a:t>
-            </a:r>
-          </a:p>
-        </p:txBody>
-      </p:sp>
-      <p:sp>
-        <p:nvSpPr>
-          <p:cNvPr id="15" name="TextBox 14"/>
+              <a:t>is oracle-best</a:t>
+            </a:r>
+          </a:p>
+        </p:txBody>
+      </p:sp>
+      <p:sp>
+        <p:nvSpPr>
+          <p:cNvPr id="28" name="TextBox 27"/>
           <p:cNvSpPr txBox="1"/>
           <p:nvPr/>
         </p:nvSpPr>
         <p:spPr>
           <a:xfrm>
-            <a:off x="-660400" y="1415796"/>
+            <a:off x="-660400" y="1904745"/>
             <a:ext cx="3048000" cy="158496"/>
           </a:xfrm>
           <a:prstGeom prst="rect">
@@ -4125,408 +4033,25 @@
             <a:r>
               <a:rPr sz="520" b="0" i="0">
                 <a:solidFill>
-                  <a:srgbClr val="6B727C"/>
+                  <a:srgbClr val="1C1E23"/>
                 </a:solidFill>
                 <a:latin typeface="Helvetica"/>
               </a:rPr>
-              <a:t>same repair, different utility</a:t>
-            </a:r>
-          </a:p>
-        </p:txBody>
-      </p:sp>
-      <p:sp>
-        <p:nvSpPr>
-          <p:cNvPr id="16" name="Rounded Rectangle 15"/>
-          <p:cNvSpPr/>
-          <p:nvPr/>
-        </p:nvSpPr>
-        <p:spPr>
-          <a:xfrm>
-            <a:off x="50800" y="1524000"/>
-            <a:ext cx="1625600" cy="381000"/>
-          </a:xfrm>
-          <a:prstGeom prst="roundRect">
-            <a:avLst>
-              <a:gd name="adj" fmla="val 781"/>
-            </a:avLst>
-          </a:prstGeom>
-          <a:solidFill>
-            <a:srgbClr val="FFFFFF"/>
-          </a:solidFill>
-          <a:ln w="7620">
-            <a:solidFill>
-              <a:srgbClr val="CCCED3"/>
-            </a:solidFill>
-          </a:ln>
-          <a:effectLst/>
-        </p:spPr>
-        <p:style>
-          <a:lnRef idx="1">
-            <a:schemeClr val="accent1"/>
-          </a:lnRef>
-          <a:fillRef idx="3">
-            <a:schemeClr val="accent1"/>
-          </a:fillRef>
-          <a:effectRef idx="2">
-            <a:schemeClr val="accent1"/>
-          </a:effectRef>
-          <a:fontRef idx="minor">
-            <a:schemeClr val="lt1"/>
-          </a:fontRef>
-        </p:style>
-        <p:txBody>
-          <a:bodyPr rtlCol="0" anchor="ctr"/>
-          <a:lstStyle/>
-          <a:p>
-            <a:pPr algn="ctr"/>
-          </a:p>
-        </p:txBody>
-      </p:sp>
-      <p:sp>
-        <p:nvSpPr>
-          <p:cNvPr id="17" name="Freeform 16"/>
-          <p:cNvSpPr/>
-          <p:nvPr/>
-        </p:nvSpPr>
-        <p:spPr>
-          <a:xfrm>
-            <a:off x="114300" y="1664892"/>
-            <a:ext cx="1498600" cy="177841"/>
-          </a:xfrm>
-          <a:custGeom>
-            <a:avLst/>
-            <a:gdLst/>
-            <a:ahLst/>
-            <a:cxnLst/>
-            <a:rect l="l" t="t" r="r" b="b"/>
-            <a:pathLst>
-              <a:path w="1498600" h="177841">
-                <a:moveTo>
-                  <a:pt x="0" y="87708"/>
-                </a:moveTo>
-                <a:lnTo>
-                  <a:pt x="14986" y="64352"/>
-                </a:lnTo>
-                <a:lnTo>
-                  <a:pt x="29972" y="43245"/>
-                </a:lnTo>
-                <a:lnTo>
-                  <a:pt x="44958" y="26259"/>
-                </a:lnTo>
-                <a:lnTo>
-                  <a:pt x="59944" y="14586"/>
-                </a:lnTo>
-                <a:lnTo>
-                  <a:pt x="74930" y="8552"/>
-                </a:lnTo>
-                <a:lnTo>
-                  <a:pt x="89915" y="7597"/>
-                </a:lnTo>
-                <a:lnTo>
-                  <a:pt x="104902" y="10413"/>
-                </a:lnTo>
-                <a:lnTo>
-                  <a:pt x="119887" y="15215"/>
-                </a:lnTo>
-                <a:lnTo>
-                  <a:pt x="134873" y="20104"/>
-                </a:lnTo>
-                <a:lnTo>
-                  <a:pt x="149860" y="23436"/>
-                </a:lnTo>
-                <a:lnTo>
-                  <a:pt x="164846" y="24145"/>
-                </a:lnTo>
-                <a:lnTo>
-                  <a:pt x="179832" y="21951"/>
-                </a:lnTo>
-                <a:lnTo>
-                  <a:pt x="194818" y="17412"/>
-                </a:lnTo>
-                <a:lnTo>
-                  <a:pt x="209804" y="11823"/>
-                </a:lnTo>
-                <a:lnTo>
-                  <a:pt x="224790" y="6960"/>
-                </a:lnTo>
-                <a:lnTo>
-                  <a:pt x="239776" y="4736"/>
-                </a:lnTo>
-                <a:lnTo>
-                  <a:pt x="254762" y="6827"/>
-                </a:lnTo>
-                <a:lnTo>
-                  <a:pt x="269748" y="14332"/>
-                </a:lnTo>
-                <a:lnTo>
-                  <a:pt x="284734" y="27539"/>
-                </a:lnTo>
-                <a:lnTo>
-                  <a:pt x="299720" y="45838"/>
-                </a:lnTo>
-                <a:lnTo>
-                  <a:pt x="314706" y="67793"/>
-                </a:lnTo>
-                <a:lnTo>
-                  <a:pt x="329692" y="91375"/>
-                </a:lnTo>
-                <a:lnTo>
-                  <a:pt x="344678" y="114294"/>
-                </a:lnTo>
-                <a:lnTo>
-                  <a:pt x="359664" y="134381"/>
-                </a:lnTo>
-                <a:lnTo>
-                  <a:pt x="374650" y="149953"/>
-                </a:lnTo>
-                <a:lnTo>
-                  <a:pt x="389636" y="160081"/>
-                </a:lnTo>
-                <a:lnTo>
-                  <a:pt x="404622" y="164725"/>
-                </a:lnTo>
-                <a:lnTo>
-                  <a:pt x="419608" y="164702"/>
-                </a:lnTo>
-                <a:lnTo>
-                  <a:pt x="434594" y="161500"/>
-                </a:lnTo>
-                <a:lnTo>
-                  <a:pt x="779272" y="21439"/>
-                </a:lnTo>
-                <a:lnTo>
-                  <a:pt x="794258" y="24395"/>
-                </a:lnTo>
-                <a:lnTo>
-                  <a:pt x="809244" y="24985"/>
-                </a:lnTo>
-                <a:lnTo>
-                  <a:pt x="824230" y="22658"/>
-                </a:lnTo>
-                <a:lnTo>
-                  <a:pt x="839216" y="17705"/>
-                </a:lnTo>
-                <a:lnTo>
-                  <a:pt x="854201" y="11204"/>
-                </a:lnTo>
-                <a:lnTo>
-                  <a:pt x="869188" y="4817"/>
-                </a:lnTo>
-                <a:lnTo>
-                  <a:pt x="884173" y="475"/>
-                </a:lnTo>
-                <a:lnTo>
-                  <a:pt x="899160" y="0"/>
-                </a:lnTo>
-                <a:lnTo>
-                  <a:pt x="914146" y="4745"/>
-                </a:lnTo>
-                <a:lnTo>
-                  <a:pt x="929132" y="15320"/>
-                </a:lnTo>
-                <a:lnTo>
-                  <a:pt x="944118" y="31444"/>
-                </a:lnTo>
-                <a:lnTo>
-                  <a:pt x="959104" y="51967"/>
-                </a:lnTo>
-                <a:lnTo>
-                  <a:pt x="974090" y="75043"/>
-                </a:lnTo>
-                <a:lnTo>
-                  <a:pt x="989076" y="98432"/>
-                </a:lnTo>
-                <a:lnTo>
-                  <a:pt x="1004062" y="119882"/>
-                </a:lnTo>
-                <a:lnTo>
-                  <a:pt x="1019048" y="137498"/>
-                </a:lnTo>
-                <a:lnTo>
-                  <a:pt x="1034033" y="150054"/>
-                </a:lnTo>
-                <a:lnTo>
-                  <a:pt x="1049020" y="157182"/>
-                </a:lnTo>
-                <a:lnTo>
-                  <a:pt x="1064006" y="159396"/>
-                </a:lnTo>
-                <a:lnTo>
-                  <a:pt x="1078992" y="157962"/>
-                </a:lnTo>
-                <a:lnTo>
-                  <a:pt x="1093978" y="154629"/>
-                </a:lnTo>
-                <a:lnTo>
-                  <a:pt x="1108964" y="151269"/>
-                </a:lnTo>
-                <a:lnTo>
-                  <a:pt x="1123950" y="149507"/>
-                </a:lnTo>
-                <a:lnTo>
-                  <a:pt x="1138936" y="150398"/>
-                </a:lnTo>
-                <a:lnTo>
-                  <a:pt x="1153922" y="154214"/>
-                </a:lnTo>
-                <a:lnTo>
-                  <a:pt x="1168908" y="160385"/>
-                </a:lnTo>
-                <a:lnTo>
-                  <a:pt x="1183894" y="167605"/>
-                </a:lnTo>
-                <a:lnTo>
-                  <a:pt x="1198880" y="174072"/>
-                </a:lnTo>
-                <a:lnTo>
-                  <a:pt x="1213866" y="177841"/>
-                </a:lnTo>
-                <a:lnTo>
-                  <a:pt x="1228852" y="177193"/>
-                </a:lnTo>
-                <a:lnTo>
-                  <a:pt x="1243838" y="170982"/>
-                </a:lnTo>
-                <a:lnTo>
-                  <a:pt x="1258823" y="158868"/>
-                </a:lnTo>
-                <a:lnTo>
-                  <a:pt x="1273810" y="141418"/>
-                </a:lnTo>
-                <a:lnTo>
-                  <a:pt x="1288796" y="120027"/>
-                </a:lnTo>
-                <a:lnTo>
-                  <a:pt x="1303782" y="96703"/>
-                </a:lnTo>
-                <a:lnTo>
-                  <a:pt x="1318768" y="73728"/>
-                </a:lnTo>
-                <a:lnTo>
-                  <a:pt x="1333754" y="53280"/>
-                </a:lnTo>
-                <a:lnTo>
-                  <a:pt x="1348740" y="37067"/>
-                </a:lnTo>
-                <a:lnTo>
-                  <a:pt x="1363726" y="26054"/>
-                </a:lnTo>
-                <a:lnTo>
-                  <a:pt x="1378712" y="20324"/>
-                </a:lnTo>
-                <a:lnTo>
-                  <a:pt x="1393698" y="19102"/>
-                </a:lnTo>
-                <a:lnTo>
-                  <a:pt x="1408683" y="20941"/>
-                </a:lnTo>
-                <a:lnTo>
-                  <a:pt x="1423670" y="24018"/>
-                </a:lnTo>
-                <a:lnTo>
-                  <a:pt x="1438656" y="26510"/>
-                </a:lnTo>
-                <a:lnTo>
-                  <a:pt x="1453642" y="26957"/>
-                </a:lnTo>
-                <a:lnTo>
-                  <a:pt x="1468628" y="24550"/>
-                </a:lnTo>
-                <a:lnTo>
-                  <a:pt x="1483614" y="19303"/>
-                </a:lnTo>
-                <a:lnTo>
-                  <a:pt x="1498600" y="12054"/>
-                </a:lnTo>
-              </a:path>
-            </a:pathLst>
-          </a:custGeom>
-          <a:noFill/>
-          <a:ln w="11430">
-            <a:solidFill>
-              <a:srgbClr val="1C1E23"/>
-            </a:solidFill>
-          </a:ln>
-          <a:effectLst/>
-        </p:spPr>
-        <p:style>
-          <a:lnRef idx="1">
-            <a:schemeClr val="accent1"/>
-          </a:lnRef>
-          <a:fillRef idx="3">
-            <a:schemeClr val="accent1"/>
-          </a:fillRef>
-          <a:effectRef idx="2">
-            <a:schemeClr val="accent1"/>
-          </a:effectRef>
-          <a:fontRef idx="minor">
-            <a:schemeClr val="lt1"/>
-          </a:fontRef>
-        </p:style>
-        <p:txBody>
-          <a:bodyPr rtlCol="0" anchor="ctr"/>
-          <a:lstStyle/>
-          <a:p>
-            <a:pPr algn="ctr"/>
-          </a:p>
-        </p:txBody>
-      </p:sp>
-      <p:sp>
-        <p:nvSpPr>
-          <p:cNvPr id="18" name="Rectangle 17"/>
-          <p:cNvSpPr/>
-          <p:nvPr/>
-        </p:nvSpPr>
-        <p:spPr>
-          <a:xfrm>
-            <a:off x="558800" y="1587500"/>
-            <a:ext cx="330200" cy="254000"/>
-          </a:xfrm>
-          <a:prstGeom prst="rect">
-            <a:avLst/>
-          </a:prstGeom>
-          <a:solidFill>
-            <a:srgbClr val="FCEAEA"/>
-          </a:solidFill>
-          <a:ln w="6350">
-            <a:solidFill>
-              <a:srgbClr val="AD2B2B"/>
-            </a:solidFill>
-          </a:ln>
-          <a:effectLst/>
-        </p:spPr>
-        <p:style>
-          <a:lnRef idx="1">
-            <a:schemeClr val="accent1"/>
-          </a:lnRef>
-          <a:fillRef idx="3">
-            <a:schemeClr val="accent1"/>
-          </a:fillRef>
-          <a:effectRef idx="2">
-            <a:schemeClr val="accent1"/>
-          </a:effectRef>
-          <a:fontRef idx="minor">
-            <a:schemeClr val="lt1"/>
-          </a:fontRef>
-        </p:style>
-        <p:txBody>
-          <a:bodyPr rtlCol="0" anchor="ctr"/>
-          <a:lstStyle/>
-          <a:p>
-            <a:pPr algn="ctr"/>
-          </a:p>
-        </p:txBody>
-      </p:sp>
-      <p:sp>
-        <p:nvSpPr>
-          <p:cNvPr id="19" name="TextBox 18"/>
+              <a:t>BEST FIXED gap = [MAIN_HET_GAP]</a:t>
+            </a:r>
+          </a:p>
+        </p:txBody>
+      </p:sp>
+      <p:sp>
+        <p:nvSpPr>
+          <p:cNvPr id="29" name="TextBox 28"/>
           <p:cNvSpPr txBox="1"/>
           <p:nvPr/>
         </p:nvSpPr>
         <p:spPr>
           <a:xfrm>
-            <a:off x="-800100" y="1647825"/>
-            <a:ext cx="3048000" cy="152400"/>
+            <a:off x="-660400" y="2011489"/>
+            <a:ext cx="3048000" cy="149352"/>
           </a:xfrm>
           <a:prstGeom prst="rect">
             <a:avLst/>
@@ -4541,27 +4066,27 @@
           <a:p>
             <a:pPr algn="ctr"/>
             <a:r>
-              <a:rPr sz="500" b="0" i="0">
-                <a:solidFill>
-                  <a:srgbClr val="AD2B2B"/>
+              <a:rPr sz="490" b="0" i="0">
+                <a:solidFill>
+                  <a:srgbClr val="6B727C"/>
                 </a:solidFill>
                 <a:latin typeface="Helvetica"/>
               </a:rPr>
-              <a:t>gap</a:t>
-            </a:r>
-          </a:p>
-        </p:txBody>
-      </p:sp>
-      <p:sp>
-        <p:nvSpPr>
-          <p:cNvPr id="20" name="TextBox 19"/>
+              <a:t>one fixed policy leaves improvement unused</a:t>
+            </a:r>
+          </a:p>
+        </p:txBody>
+      </p:sp>
+      <p:sp>
+        <p:nvSpPr>
+          <p:cNvPr id="30" name="TextBox 29"/>
           <p:cNvSpPr txBox="1"/>
           <p:nvPr/>
         </p:nvSpPr>
         <p:spPr>
           <a:xfrm>
-            <a:off x="-660400" y="1907158"/>
-            <a:ext cx="3048000" cy="176784"/>
+            <a:off x="1041400" y="4571"/>
+            <a:ext cx="3048000" cy="195072"/>
           </a:xfrm>
           <a:prstGeom prst="rect">
             <a:avLst/>
@@ -4576,27 +4101,27 @@
           <a:p>
             <a:pPr algn="ctr"/>
             <a:r>
-              <a:rPr sz="580" b="0" i="0">
-                <a:solidFill>
-                  <a:srgbClr val="AD6B0A"/>
+              <a:rPr sz="640" b="1" i="0">
+                <a:solidFill>
+                  <a:srgbClr val="1C1E23"/>
                 </a:solidFill>
                 <a:latin typeface="Helvetica"/>
               </a:rPr>
-              <a:t>Episode C: Multi TS-ICL is best</a:t>
-            </a:r>
-          </a:p>
-        </p:txBody>
-      </p:sp>
-      <p:sp>
-        <p:nvSpPr>
-          <p:cNvPr id="21" name="TextBox 20"/>
+              <a:t>(b) Historical full-action replay</a:t>
+            </a:r>
+          </a:p>
+        </p:txBody>
+      </p:sp>
+      <p:sp>
+        <p:nvSpPr>
+          <p:cNvPr id="31" name="TextBox 30"/>
           <p:cNvSpPr txBox="1"/>
           <p:nvPr/>
         </p:nvSpPr>
         <p:spPr>
           <a:xfrm>
-            <a:off x="-660400" y="2012695"/>
-            <a:ext cx="3048000" cy="158496"/>
+            <a:off x="1041400" y="112522"/>
+            <a:ext cx="3048000" cy="195072"/>
           </a:xfrm>
           <a:prstGeom prst="rect">
             <a:avLst/>
@@ -4611,90 +4136,20 @@
           <a:p>
             <a:pPr algn="ctr"/>
             <a:r>
-              <a:rPr sz="520" b="0" i="0">
-                <a:solidFill>
-                  <a:srgbClr val="6B727C"/>
+              <a:rPr sz="640" b="1" i="0">
+                <a:solidFill>
+                  <a:srgbClr val="1C1E23"/>
                 </a:solidFill>
                 <a:latin typeface="Helvetica"/>
               </a:rPr>
-              <a:t>same repair, different utility</a:t>
-            </a:r>
-          </a:p>
-        </p:txBody>
-      </p:sp>
-      <p:sp>
-        <p:nvSpPr>
-          <p:cNvPr id="22" name="TextBox 21"/>
-          <p:cNvSpPr txBox="1"/>
-          <p:nvPr/>
-        </p:nvSpPr>
-        <p:spPr>
-          <a:xfrm>
-            <a:off x="1041400" y="4571"/>
-            <a:ext cx="3048000" cy="195072"/>
-          </a:xfrm>
-          <a:prstGeom prst="rect">
-            <a:avLst/>
-          </a:prstGeom>
-          <a:noFill/>
-        </p:spPr>
-        <p:txBody>
-          <a:bodyPr wrap="none" lIns="0" rIns="0" tIns="0" bIns="0" anchor="ctr">
-            <a:spAutoFit/>
-          </a:bodyPr>
-          <a:lstStyle/>
-          <a:p>
-            <a:pPr algn="ctr"/>
-            <a:r>
-              <a:rPr sz="640" b="1" i="0">
-                <a:solidFill>
-                  <a:srgbClr val="1C1E23"/>
-                </a:solidFill>
-                <a:latin typeface="Helvetica"/>
-              </a:rPr>
-              <a:t>(b) Counterfactual replay</a:t>
-            </a:r>
-          </a:p>
-        </p:txBody>
-      </p:sp>
-      <p:sp>
-        <p:nvSpPr>
-          <p:cNvPr id="23" name="TextBox 22"/>
-          <p:cNvSpPr txBox="1"/>
-          <p:nvPr/>
-        </p:nvSpPr>
-        <p:spPr>
-          <a:xfrm>
-            <a:off x="1041400" y="112522"/>
-            <a:ext cx="3048000" cy="195072"/>
-          </a:xfrm>
-          <a:prstGeom prst="rect">
-            <a:avLst/>
-          </a:prstGeom>
-          <a:noFill/>
-        </p:spPr>
-        <p:txBody>
-          <a:bodyPr wrap="none" lIns="0" rIns="0" tIns="0" bIns="0" anchor="ctr">
-            <a:spAutoFit/>
-          </a:bodyPr>
-          <a:lstStyle/>
-          <a:p>
-            <a:pPr algn="ctr"/>
-            <a:r>
-              <a:rPr sz="640" b="1" i="0">
-                <a:solidFill>
-                  <a:srgbClr val="1C1E23"/>
-                </a:solidFill>
-                <a:latin typeface="Helvetica"/>
-              </a:rPr>
-              <a:t>on historical TRAIN windows</a:t>
-            </a:r>
-          </a:p>
-        </p:txBody>
-      </p:sp>
-      <p:sp>
-        <p:nvSpPr>
-          <p:cNvPr id="24" name="Rounded Rectangle 23"/>
+              <a:t>on TRAIN windows</a:t>
+            </a:r>
+          </a:p>
+        </p:txBody>
+      </p:sp>
+      <p:sp>
+        <p:nvSpPr>
+          <p:cNvPr id="32" name="Rounded Rectangle 31"/>
           <p:cNvSpPr/>
           <p:nvPr/>
         </p:nvSpPr>
@@ -4742,7 +4197,7 @@
       </p:sp>
       <p:sp>
         <p:nvSpPr>
-          <p:cNvPr id="25" name="TextBox 24"/>
+          <p:cNvPr id="33" name="TextBox 32"/>
           <p:cNvSpPr txBox="1"/>
           <p:nvPr/>
         </p:nvSpPr>
@@ -4770,14 +4225,14 @@
                 </a:solidFill>
                 <a:latin typeface="Helvetica"/>
               </a:rPr>
-              <a:t>Fully observed TRAIN window</a:t>
-            </a:r>
-          </a:p>
-        </p:txBody>
-      </p:sp>
-      <p:sp>
-        <p:nvSpPr>
-          <p:cNvPr id="26" name="TextBox 25"/>
+              <a:t>Complete TRAIN window</a:t>
+            </a:r>
+          </a:p>
+        </p:txBody>
+      </p:sp>
+      <p:sp>
+        <p:nvSpPr>
+          <p:cNvPr id="34" name="TextBox 33"/>
           <p:cNvSpPr txBox="1"/>
           <p:nvPr/>
         </p:nvSpPr>
@@ -4805,14 +4260,14 @@
                 </a:solidFill>
                 <a:latin typeface="Helvetica"/>
               </a:rPr>
-              <a:t>(its future is legal history)</a:t>
+              <a:t>(its future is available history)</a:t>
             </a:r>
           </a:p>
         </p:txBody>
       </p:sp>
       <p:cxnSp>
         <p:nvCxnSpPr>
-          <p:cNvPr id="27" name="Connector 26"/>
+          <p:cNvPr id="35" name="Connector 34"/>
           <p:cNvCxnSpPr/>
           <p:nvPr/>
         </p:nvCxnSpPr>
@@ -4847,7 +4302,7 @@
       </p:cxnSp>
       <p:sp>
         <p:nvSpPr>
-          <p:cNvPr id="28" name="Rounded Rectangle 27"/>
+          <p:cNvPr id="36" name="Rounded Rectangle 35"/>
           <p:cNvSpPr/>
           <p:nvPr/>
         </p:nvSpPr>
@@ -4895,7 +4350,7 @@
       </p:sp>
       <p:sp>
         <p:nvSpPr>
-          <p:cNvPr id="29" name="TextBox 28"/>
+          <p:cNvPr id="37" name="TextBox 36"/>
           <p:cNvSpPr txBox="1"/>
           <p:nvPr/>
         </p:nvSpPr>
@@ -4923,14 +4378,14 @@
                 </a:solidFill>
                 <a:latin typeface="Helvetica"/>
               </a:rPr>
-              <a:t>Inject the deployment</a:t>
-            </a:r>
-          </a:p>
-        </p:txBody>
-      </p:sp>
-      <p:sp>
-        <p:nvSpPr>
-          <p:cNvPr id="30" name="TextBox 29"/>
+              <a:t>Inject the registered</a:t>
+            </a:r>
+          </a:p>
+        </p:txBody>
+      </p:sp>
+      <p:sp>
+        <p:nvSpPr>
+          <p:cNvPr id="38" name="TextBox 37"/>
           <p:cNvSpPr txBox="1"/>
           <p:nvPr/>
         </p:nvSpPr>
@@ -4958,14 +4413,14 @@
                 </a:solidFill>
                 <a:latin typeface="Helvetica"/>
               </a:rPr>
-              <a:t>missingness mechanism</a:t>
+              <a:t>missingness protocol</a:t>
             </a:r>
           </a:p>
         </p:txBody>
       </p:sp>
       <p:cxnSp>
         <p:nvCxnSpPr>
-          <p:cNvPr id="31" name="Connector 30"/>
+          <p:cNvPr id="39" name="Connector 38"/>
           <p:cNvCxnSpPr/>
           <p:nvPr/>
         </p:nvCxnSpPr>
@@ -5000,7 +4455,7 @@
       </p:cxnSp>
       <p:sp>
         <p:nvSpPr>
-          <p:cNvPr id="32" name="Rounded Rectangle 31"/>
+          <p:cNvPr id="40" name="Rounded Rectangle 39"/>
           <p:cNvSpPr/>
           <p:nvPr/>
         </p:nvSpPr>
@@ -5048,7 +4503,7 @@
       </p:sp>
       <p:sp>
         <p:nvSpPr>
-          <p:cNvPr id="33" name="TextBox 32"/>
+          <p:cNvPr id="41" name="TextBox 40"/>
           <p:cNvSpPr txBox="1"/>
           <p:nvPr/>
         </p:nvSpPr>
@@ -5076,14 +4531,14 @@
                 </a:solidFill>
                 <a:latin typeface="Helvetica"/>
               </a:rPr>
-              <a:t>Execute every legal action</a:t>
-            </a:r>
-          </a:p>
-        </p:txBody>
-      </p:sp>
-      <p:sp>
-        <p:nvSpPr>
-          <p:cNvPr id="34" name="TextBox 33"/>
+              <a:t>Execute every catalog action</a:t>
+            </a:r>
+          </a:p>
+        </p:txBody>
+      </p:sp>
+      <p:sp>
+        <p:nvSpPr>
+          <p:cNvPr id="42" name="TextBox 41"/>
           <p:cNvSpPr txBox="1"/>
           <p:nvPr/>
         </p:nvSpPr>
@@ -5118,7 +4573,7 @@
       </p:sp>
       <p:sp>
         <p:nvSpPr>
-          <p:cNvPr id="35" name="TextBox 34"/>
+          <p:cNvPr id="43" name="TextBox 42"/>
           <p:cNvSpPr txBox="1"/>
           <p:nvPr/>
         </p:nvSpPr>
@@ -5146,14 +4601,14 @@
                 </a:solidFill>
                 <a:latin typeface="Helvetica"/>
               </a:rPr>
-              <a:t>and observe the true future</a:t>
+              <a:t>and observe the realised future</a:t>
             </a:r>
           </a:p>
         </p:txBody>
       </p:sp>
       <p:cxnSp>
         <p:nvCxnSpPr>
-          <p:cNvPr id="36" name="Connector 35"/>
+          <p:cNvPr id="44" name="Connector 43"/>
           <p:cNvCxnSpPr/>
           <p:nvPr/>
         </p:nvCxnSpPr>
@@ -5188,7 +4643,7 @@
       </p:cxnSp>
       <p:sp>
         <p:nvSpPr>
-          <p:cNvPr id="37" name="Rounded Rectangle 36"/>
+          <p:cNvPr id="45" name="Rounded Rectangle 44"/>
           <p:cNvSpPr/>
           <p:nvPr/>
         </p:nvSpPr>
@@ -5236,7 +4691,7 @@
       </p:sp>
       <p:sp>
         <p:nvSpPr>
-          <p:cNvPr id="38" name="TextBox 37"/>
+          <p:cNvPr id="46" name="TextBox 45"/>
           <p:cNvSpPr txBox="1"/>
           <p:nvPr/>
         </p:nvSpPr>
@@ -5264,14 +4719,14 @@
                 </a:solidFill>
                 <a:latin typeface="Helvetica"/>
               </a:rPr>
-              <a:t>Record the realised task loss</a:t>
-            </a:r>
-          </a:p>
-        </p:txBody>
-      </p:sp>
-      <p:sp>
-        <p:nvSpPr>
-          <p:cNvPr id="39" name="TextBox 38"/>
+              <a:t>Record realised utility</a:t>
+            </a:r>
+          </a:p>
+        </p:txBody>
+      </p:sp>
+      <p:sp>
+        <p:nvSpPr>
+          <p:cNvPr id="47" name="TextBox 46"/>
           <p:cNvSpPr txBox="1"/>
           <p:nvPr/>
         </p:nvSpPr>
@@ -5299,21 +4754,21 @@
                 </a:solidFill>
                 <a:latin typeface="Helvetica"/>
               </a:rPr>
-              <a:t>L[i,a] and regret r[i,a] = L[i,a] - L*[i]</a:t>
-            </a:r>
-          </a:p>
-        </p:txBody>
-      </p:sp>
-      <p:sp>
-        <p:nvSpPr>
-          <p:cNvPr id="40" name="TextBox 39"/>
+              <a:t>g[i,a] = loss(KEEP) - loss(a)</a:t>
+            </a:r>
+          </a:p>
+        </p:txBody>
+      </p:sp>
+      <p:sp>
+        <p:nvSpPr>
+          <p:cNvPr id="48" name="TextBox 47"/>
           <p:cNvSpPr txBox="1"/>
           <p:nvPr/>
         </p:nvSpPr>
         <p:spPr>
           <a:xfrm>
-            <a:off x="1041400" y="1834388"/>
-            <a:ext cx="3048000" cy="170688"/>
+            <a:off x="1041400" y="1837817"/>
+            <a:ext cx="3048000" cy="164592"/>
           </a:xfrm>
           <a:prstGeom prst="rect">
             <a:avLst/>
@@ -5328,20 +4783,20 @@
           <a:p>
             <a:pPr algn="ctr"/>
             <a:r>
-              <a:rPr sz="560" b="0" i="0">
+              <a:rPr sz="540" b="0" i="0">
                 <a:solidFill>
                   <a:srgbClr val="19704F"/>
                 </a:solidFill>
                 <a:latin typeface="Helvetica"/>
               </a:rPr>
-              <a:t>replay bank  B = {(z[i], a, L[i,a])}</a:t>
-            </a:r>
-          </a:p>
-        </p:txBody>
-      </p:sp>
-      <p:sp>
-        <p:nvSpPr>
-          <p:cNvPr id="41" name="TextBox 40"/>
+              <a:t>replay bank  B = {(z[i,a], a, g[i,a])}</a:t>
+            </a:r>
+          </a:p>
+        </p:txBody>
+      </p:sp>
+      <p:sp>
+        <p:nvSpPr>
+          <p:cNvPr id="49" name="TextBox 48"/>
           <p:cNvSpPr txBox="1"/>
           <p:nvPr/>
         </p:nvSpPr>
@@ -5369,14 +4824,14 @@
                 </a:solidFill>
                 <a:latin typeface="Helvetica"/>
               </a:rPr>
-              <a:t>the bank stores a task consequence,</a:t>
-            </a:r>
-          </a:p>
-        </p:txBody>
-      </p:sp>
-      <p:sp>
-        <p:nvSpPr>
-          <p:cNvPr id="42" name="TextBox 41"/>
+              <a:t>the bank holds realised forecasting utility</a:t>
+            </a:r>
+          </a:p>
+        </p:txBody>
+      </p:sp>
+      <p:sp>
+        <p:nvSpPr>
+          <p:cNvPr id="50" name="TextBox 49"/>
           <p:cNvSpPr txBox="1"/>
           <p:nvPr/>
         </p:nvSpPr>
@@ -5404,21 +4859,21 @@
                 </a:solidFill>
                 <a:latin typeface="Helvetica"/>
               </a:rPr>
-              <a:t>not a reconstruction score</a:t>
-            </a:r>
-          </a:p>
-        </p:txBody>
-      </p:sp>
-      <p:sp>
-        <p:nvSpPr>
-          <p:cNvPr id="43" name="TextBox 42"/>
+              <a:t>and not a reconstruction score</a:t>
+            </a:r>
+          </a:p>
+        </p:txBody>
+      </p:sp>
+      <p:sp>
+        <p:nvSpPr>
+          <p:cNvPr id="51" name="TextBox 50"/>
           <p:cNvSpPr txBox="1"/>
           <p:nvPr/>
         </p:nvSpPr>
         <p:spPr>
           <a:xfrm>
-            <a:off x="2692400" y="8000"/>
-            <a:ext cx="3048000" cy="188976"/>
+            <a:off x="2692400" y="4571"/>
+            <a:ext cx="3048000" cy="195072"/>
           </a:xfrm>
           <a:prstGeom prst="rect">
             <a:avLst/>
@@ -5433,20 +4888,55 @@
           <a:p>
             <a:pPr algn="ctr"/>
             <a:r>
-              <a:rPr sz="620" b="1" i="0">
+              <a:rPr sz="640" b="1" i="0">
                 <a:solidFill>
                   <a:srgbClr val="1C1E23"/>
                 </a:solidFill>
                 <a:latin typeface="Helvetica"/>
               </a:rPr>
-              <a:t>(c) Score -&gt; rank -&gt; select / KEEP</a:t>
-            </a:r>
-          </a:p>
-        </p:txBody>
-      </p:sp>
-      <p:sp>
-        <p:nvSpPr>
-          <p:cNvPr id="44" name="Rounded Rectangle 43"/>
+              <a:t>(c) Online act-or-keep</a:t>
+            </a:r>
+          </a:p>
+        </p:txBody>
+      </p:sp>
+      <p:sp>
+        <p:nvSpPr>
+          <p:cNvPr id="52" name="TextBox 51"/>
+          <p:cNvSpPr txBox="1"/>
+          <p:nvPr/>
+        </p:nvSpPr>
+        <p:spPr>
+          <a:xfrm>
+            <a:off x="2692400" y="112522"/>
+            <a:ext cx="3048000" cy="195072"/>
+          </a:xfrm>
+          <a:prstGeom prst="rect">
+            <a:avLst/>
+          </a:prstGeom>
+          <a:noFill/>
+        </p:spPr>
+        <p:txBody>
+          <a:bodyPr wrap="none" lIns="0" rIns="0" tIns="0" bIns="0" anchor="ctr">
+            <a:spAutoFit/>
+          </a:bodyPr>
+          <a:lstStyle/>
+          <a:p>
+            <a:pPr algn="ctr"/>
+            <a:r>
+              <a:rPr sz="640" b="1" i="0">
+                <a:solidFill>
+                  <a:srgbClr val="1C1E23"/>
+                </a:solidFill>
+                <a:latin typeface="Helvetica"/>
+              </a:rPr>
+              <a:t>one request at a time</a:t>
+            </a:r>
+          </a:p>
+        </p:txBody>
+      </p:sp>
+      <p:sp>
+        <p:nvSpPr>
+          <p:cNvPr id="53" name="Rounded Rectangle 52"/>
           <p:cNvSpPr/>
           <p:nvPr/>
         </p:nvSpPr>
@@ -5494,7 +4984,7 @@
       </p:sp>
       <p:sp>
         <p:nvSpPr>
-          <p:cNvPr id="45" name="TextBox 44"/>
+          <p:cNvPr id="54" name="TextBox 53"/>
           <p:cNvSpPr txBox="1"/>
           <p:nvPr/>
         </p:nvSpPr>
@@ -5529,7 +5019,7 @@
       </p:sp>
       <p:cxnSp>
         <p:nvCxnSpPr>
-          <p:cNvPr id="46" name="Connector 45"/>
+          <p:cNvPr id="55" name="Connector 54"/>
           <p:cNvCxnSpPr/>
           <p:nvPr/>
         </p:nvCxnSpPr>
@@ -5564,14 +5054,14 @@
       </p:cxnSp>
       <p:sp>
         <p:nvSpPr>
-          <p:cNvPr id="47" name="Rounded Rectangle 46"/>
+          <p:cNvPr id="56" name="Rounded Rectangle 55"/>
           <p:cNvSpPr/>
           <p:nvPr/>
         </p:nvSpPr>
         <p:spPr>
           <a:xfrm>
             <a:off x="3454400" y="673100"/>
-            <a:ext cx="1524000" cy="254000"/>
+            <a:ext cx="1524000" cy="279400"/>
           </a:xfrm>
           <a:prstGeom prst="roundRect">
             <a:avLst>
@@ -5612,13 +5102,13 @@
       </p:sp>
       <p:sp>
         <p:nvSpPr>
-          <p:cNvPr id="48" name="TextBox 47"/>
+          <p:cNvPr id="57" name="TextBox 56"/>
           <p:cNvSpPr txBox="1"/>
           <p:nvPr/>
         </p:nvSpPr>
         <p:spPr>
           <a:xfrm>
-            <a:off x="2692400" y="677418"/>
+            <a:off x="2692400" y="690118"/>
             <a:ext cx="3048000" cy="170688"/>
           </a:xfrm>
           <a:prstGeom prst="rect">
@@ -5640,20 +5130,20 @@
                 </a:solidFill>
                 <a:latin typeface="Helvetica"/>
               </a:rPr>
-              <a:t>Observable state z</a:t>
-            </a:r>
-          </a:p>
-        </p:txBody>
-      </p:sp>
-      <p:sp>
-        <p:nvSpPr>
-          <p:cNvPr id="49" name="TextBox 48"/>
+              <a:t>Reference call p0 = F(X[a0])</a:t>
+            </a:r>
+          </a:p>
+        </p:txBody>
+      </p:sp>
+      <p:sp>
+        <p:nvSpPr>
+          <p:cNvPr id="58" name="TextBox 57"/>
           <p:cNvSpPr txBox="1"/>
           <p:nvPr/>
         </p:nvSpPr>
         <p:spPr>
           <a:xfrm>
-            <a:off x="2692400" y="772668"/>
+            <a:off x="2692400" y="785368"/>
             <a:ext cx="3048000" cy="170688"/>
           </a:xfrm>
           <a:prstGeom prst="rect">
@@ -5675,20 +5165,20 @@
                 </a:solidFill>
                 <a:latin typeface="Helvetica"/>
               </a:rPr>
-              <a:t>(no forecast is read)</a:t>
+              <a:t>state z_a per action</a:t>
             </a:r>
           </a:p>
         </p:txBody>
       </p:sp>
       <p:cxnSp>
         <p:nvCxnSpPr>
-          <p:cNvPr id="50" name="Connector 49"/>
+          <p:cNvPr id="59" name="Connector 58"/>
           <p:cNvCxnSpPr/>
           <p:nvPr/>
         </p:nvCxnSpPr>
         <p:spPr>
           <a:xfrm>
-            <a:off x="4216400" y="939800"/>
+            <a:off x="4216400" y="965200"/>
             <a:ext cx="0" cy="88900"/>
           </a:xfrm>
           <a:prstGeom prst="bentConnector3">
@@ -5717,13 +5207,13 @@
       </p:cxnSp>
       <p:sp>
         <p:nvSpPr>
-          <p:cNvPr id="51" name="Rounded Rectangle 50"/>
+          <p:cNvPr id="60" name="Rounded Rectangle 59"/>
           <p:cNvSpPr/>
           <p:nvPr/>
         </p:nvSpPr>
         <p:spPr>
           <a:xfrm>
-            <a:off x="3454400" y="1041400"/>
+            <a:off x="3454400" y="1066800"/>
             <a:ext cx="1524000" cy="279400"/>
           </a:xfrm>
           <a:prstGeom prst="roundRect">
@@ -5765,13 +5255,13 @@
       </p:sp>
       <p:sp>
         <p:nvSpPr>
-          <p:cNvPr id="52" name="TextBox 51"/>
+          <p:cNvPr id="61" name="TextBox 60"/>
           <p:cNvSpPr txBox="1"/>
           <p:nvPr/>
         </p:nvSpPr>
         <p:spPr>
           <a:xfrm>
-            <a:off x="2692400" y="1066698"/>
+            <a:off x="2692400" y="1092098"/>
             <a:ext cx="3048000" cy="158496"/>
           </a:xfrm>
           <a:prstGeom prst="rect">
@@ -5793,20 +5283,20 @@
                 </a:solidFill>
                 <a:latin typeface="Helvetica"/>
               </a:rPr>
-              <a:t>Regret-aware scoring</a:t>
-            </a:r>
-          </a:p>
-        </p:txBody>
-      </p:sp>
-      <p:sp>
-        <p:nvSpPr>
-          <p:cNvPr id="53" name="TextBox 52"/>
+              <a:t>Score S[a] from the</a:t>
+            </a:r>
+          </a:p>
+        </p:txBody>
+      </p:sp>
+      <p:sp>
+        <p:nvSpPr>
+          <p:cNvPr id="62" name="TextBox 61"/>
           <p:cNvSpPr txBox="1"/>
           <p:nvPr/>
         </p:nvSpPr>
         <p:spPr>
           <a:xfrm>
-            <a:off x="2692400" y="1156868"/>
+            <a:off x="2692400" y="1182268"/>
             <a:ext cx="3048000" cy="158496"/>
           </a:xfrm>
           <a:prstGeom prst="rect">
@@ -5828,20 +5318,20 @@
                 </a:solidFill>
                 <a:latin typeface="Helvetica"/>
               </a:rPr>
-              <a:t>S[a] over the replay bank B</a:t>
+              <a:t>same-action neighbourhood</a:t>
             </a:r>
           </a:p>
         </p:txBody>
       </p:sp>
       <p:cxnSp>
         <p:nvCxnSpPr>
-          <p:cNvPr id="54" name="Connector 53"/>
+          <p:cNvPr id="63" name="Connector 62"/>
           <p:cNvCxnSpPr/>
           <p:nvPr/>
         </p:nvCxnSpPr>
         <p:spPr>
           <a:xfrm>
-            <a:off x="4216400" y="1333500"/>
+            <a:off x="4216400" y="1358900"/>
             <a:ext cx="0" cy="88900"/>
           </a:xfrm>
           <a:prstGeom prst="bentConnector3">
@@ -5870,13 +5360,13 @@
       </p:cxnSp>
       <p:sp>
         <p:nvSpPr>
-          <p:cNvPr id="55" name="Diamond 54"/>
+          <p:cNvPr id="64" name="Diamond 63"/>
           <p:cNvSpPr/>
           <p:nvPr/>
         </p:nvSpPr>
         <p:spPr>
           <a:xfrm>
-            <a:off x="3657600" y="1435100"/>
+            <a:off x="3657600" y="1460500"/>
             <a:ext cx="1117600" cy="330200"/>
           </a:xfrm>
           <a:prstGeom prst="diamond">
@@ -5916,13 +5406,13 @@
       </p:sp>
       <p:sp>
         <p:nvSpPr>
-          <p:cNvPr id="56" name="TextBox 55"/>
+          <p:cNvPr id="65" name="TextBox 64"/>
           <p:cNvSpPr txBox="1"/>
           <p:nvPr/>
         </p:nvSpPr>
         <p:spPr>
           <a:xfrm>
-            <a:off x="2692400" y="1530477"/>
+            <a:off x="2692400" y="1555877"/>
             <a:ext cx="3048000" cy="164592"/>
           </a:xfrm>
           <a:prstGeom prst="rect">
@@ -5944,20 +5434,20 @@
                 </a:solidFill>
                 <a:latin typeface="Helvetica"/>
               </a:rPr>
-              <a:t>argmax S[a] = KEEP ?</a:t>
+              <a:t>max S[a] &gt; 0 ?</a:t>
             </a:r>
           </a:p>
         </p:txBody>
       </p:sp>
       <p:cxnSp>
         <p:nvCxnSpPr>
-          <p:cNvPr id="57" name="Connector 56"/>
+          <p:cNvPr id="66" name="Connector 65"/>
           <p:cNvCxnSpPr/>
           <p:nvPr/>
         </p:nvCxnSpPr>
         <p:spPr>
           <a:xfrm>
-            <a:off x="3683000" y="1765300"/>
+            <a:off x="3683000" y="1790700"/>
             <a:ext cx="0" cy="139700"/>
           </a:xfrm>
           <a:prstGeom prst="bentConnector3">
@@ -5965,7 +5455,7 @@
           </a:prstGeom>
           <a:ln w="12700">
             <a:solidFill>
-              <a:srgbClr val="19704F"/>
+              <a:srgbClr val="AD2B2B"/>
             </a:solidFill>
           </a:ln>
         </p:spPr>
@@ -5986,13 +5476,13 @@
       </p:cxnSp>
       <p:sp>
         <p:nvSpPr>
-          <p:cNvPr id="58" name="TextBox 57"/>
+          <p:cNvPr id="67" name="TextBox 66"/>
           <p:cNvSpPr txBox="1"/>
           <p:nvPr/>
         </p:nvSpPr>
         <p:spPr>
           <a:xfrm>
-            <a:off x="2108200" y="1777745"/>
+            <a:off x="2108200" y="1803145"/>
             <a:ext cx="3048000" cy="158496"/>
           </a:xfrm>
           <a:prstGeom prst="rect">
@@ -6010,24 +5500,24 @@
             <a:r>
               <a:rPr sz="520" b="0" i="0">
                 <a:solidFill>
-                  <a:srgbClr val="19704F"/>
+                  <a:srgbClr val="AD2B2B"/>
                 </a:solidFill>
                 <a:latin typeface="Helvetica"/>
               </a:rPr>
-              <a:t>yes</a:t>
+              <a:t>no</a:t>
             </a:r>
           </a:p>
         </p:txBody>
       </p:sp>
       <p:cxnSp>
         <p:nvCxnSpPr>
-          <p:cNvPr id="59" name="Connector 58"/>
+          <p:cNvPr id="68" name="Connector 67"/>
           <p:cNvCxnSpPr/>
           <p:nvPr/>
         </p:nvCxnSpPr>
         <p:spPr>
           <a:xfrm>
-            <a:off x="4749800" y="1765300"/>
+            <a:off x="4749800" y="1790700"/>
             <a:ext cx="0" cy="139700"/>
           </a:xfrm>
           <a:prstGeom prst="bentConnector3">
@@ -6035,7 +5525,7 @@
           </a:prstGeom>
           <a:ln w="12700">
             <a:solidFill>
-              <a:srgbClr val="AD2B2B"/>
+              <a:srgbClr val="19704F"/>
             </a:solidFill>
           </a:ln>
         </p:spPr>
@@ -6056,13 +5546,13 @@
       </p:cxnSp>
       <p:sp>
         <p:nvSpPr>
-          <p:cNvPr id="60" name="TextBox 59"/>
+          <p:cNvPr id="69" name="TextBox 68"/>
           <p:cNvSpPr txBox="1"/>
           <p:nvPr/>
         </p:nvSpPr>
         <p:spPr>
           <a:xfrm>
-            <a:off x="3276600" y="1777745"/>
+            <a:off x="3276600" y="1803145"/>
             <a:ext cx="3048000" cy="158496"/>
           </a:xfrm>
           <a:prstGeom prst="rect">
@@ -6080,24 +5570,24 @@
             <a:r>
               <a:rPr sz="520" b="0" i="0">
                 <a:solidFill>
-                  <a:srgbClr val="AD2B2B"/>
+                  <a:srgbClr val="19704F"/>
                 </a:solidFill>
                 <a:latin typeface="Helvetica"/>
               </a:rPr>
-              <a:t>no</a:t>
-            </a:r>
-          </a:p>
-        </p:txBody>
-      </p:sp>
-      <p:sp>
-        <p:nvSpPr>
-          <p:cNvPr id="61" name="Rounded Rectangle 60"/>
+              <a:t>yes</a:t>
+            </a:r>
+          </a:p>
+        </p:txBody>
+      </p:sp>
+      <p:sp>
+        <p:nvSpPr>
+          <p:cNvPr id="70" name="Rounded Rectangle 69"/>
           <p:cNvSpPr/>
           <p:nvPr/>
         </p:nvSpPr>
         <p:spPr>
           <a:xfrm>
-            <a:off x="3429000" y="1917700"/>
+            <a:off x="3429000" y="1943100"/>
             <a:ext cx="711200" cy="330200"/>
           </a:xfrm>
           <a:prstGeom prst="roundRect">
@@ -6139,13 +5629,13 @@
       </p:sp>
       <p:sp>
         <p:nvSpPr>
-          <p:cNvPr id="62" name="TextBox 61"/>
+          <p:cNvPr id="71" name="TextBox 70"/>
           <p:cNvSpPr txBox="1"/>
           <p:nvPr/>
         </p:nvSpPr>
         <p:spPr>
           <a:xfrm>
-            <a:off x="2260600" y="1960118"/>
+            <a:off x="2260600" y="1985518"/>
             <a:ext cx="3048000" cy="170688"/>
           </a:xfrm>
           <a:prstGeom prst="rect">
@@ -6174,13 +5664,13 @@
       </p:sp>
       <p:sp>
         <p:nvSpPr>
-          <p:cNvPr id="63" name="TextBox 62"/>
+          <p:cNvPr id="72" name="TextBox 71"/>
           <p:cNvSpPr txBox="1"/>
           <p:nvPr/>
         </p:nvSpPr>
         <p:spPr>
           <a:xfrm>
-            <a:off x="2260600" y="2055368"/>
+            <a:off x="2260600" y="2080768"/>
             <a:ext cx="3048000" cy="170688"/>
           </a:xfrm>
           <a:prstGeom prst="rect">
@@ -6209,13 +5699,13 @@
       </p:sp>
       <p:sp>
         <p:nvSpPr>
-          <p:cNvPr id="64" name="Rounded Rectangle 63"/>
+          <p:cNvPr id="73" name="Rounded Rectangle 72"/>
           <p:cNvSpPr/>
           <p:nvPr/>
         </p:nvSpPr>
         <p:spPr>
           <a:xfrm>
-            <a:off x="4267200" y="1917700"/>
+            <a:off x="4267200" y="1943100"/>
             <a:ext cx="736600" cy="330200"/>
           </a:xfrm>
           <a:prstGeom prst="roundRect">
@@ -6257,13 +5747,13 @@
       </p:sp>
       <p:sp>
         <p:nvSpPr>
-          <p:cNvPr id="65" name="TextBox 64"/>
+          <p:cNvPr id="74" name="TextBox 73"/>
           <p:cNvSpPr txBox="1"/>
           <p:nvPr/>
         </p:nvSpPr>
         <p:spPr>
           <a:xfrm>
-            <a:off x="3111500" y="1960118"/>
+            <a:off x="3111500" y="1985518"/>
             <a:ext cx="3048000" cy="170688"/>
           </a:xfrm>
           <a:prstGeom prst="rect">
@@ -6285,20 +5775,20 @@
                 </a:solidFill>
                 <a:latin typeface="Helvetica"/>
               </a:rPr>
-              <a:t>SELECT</a:t>
-            </a:r>
-          </a:p>
-        </p:txBody>
-      </p:sp>
-      <p:sp>
-        <p:nvSpPr>
-          <p:cNvPr id="66" name="TextBox 65"/>
+              <a:t>ACT</a:t>
+            </a:r>
+          </a:p>
+        </p:txBody>
+      </p:sp>
+      <p:sp>
+        <p:nvSpPr>
+          <p:cNvPr id="75" name="TextBox 74"/>
           <p:cNvSpPr txBox="1"/>
           <p:nvPr/>
         </p:nvSpPr>
         <p:spPr>
           <a:xfrm>
-            <a:off x="3111500" y="2055368"/>
+            <a:off x="3111500" y="2080768"/>
             <a:ext cx="3048000" cy="170688"/>
           </a:xfrm>
           <a:prstGeom prst="rect">
@@ -6327,7 +5817,7 @@
       </p:sp>
       <p:sp>
         <p:nvSpPr>
-          <p:cNvPr id="67" name="TextBox 66"/>
+          <p:cNvPr id="76" name="TextBox 75"/>
           <p:cNvSpPr txBox="1"/>
           <p:nvPr/>
         </p:nvSpPr>
@@ -6355,14 +5845,14 @@
                 </a:solidFill>
                 <a:latin typeface="Helvetica"/>
               </a:rPr>
-              <a:t>KEEP is one of the arms, so abstention is a decision outcome</a:t>
+              <a:t>the reference action is always available, so the decision rule always returns a forecast</a:t>
             </a:r>
           </a:p>
         </p:txBody>
       </p:sp>
       <p:cxnSp>
         <p:nvCxnSpPr>
-          <p:cNvPr id="68" name="Connector 67"/>
+          <p:cNvPr id="77" name="Connector 76"/>
           <p:cNvCxnSpPr/>
           <p:nvPr/>
         </p:nvCxnSpPr>
@@ -6398,7 +5888,7 @@
       </p:cxnSp>
       <p:cxnSp>
         <p:nvCxnSpPr>
-          <p:cNvPr id="69" name="Connector 68"/>
+          <p:cNvPr id="78" name="Connector 77"/>
           <p:cNvCxnSpPr/>
           <p:nvPr/>
         </p:nvCxnSpPr>

--- a/latex/figure/fig1_selective_governance.pptx
+++ b/latex/figure/fig1_selective_governance.pptx
@@ -3508,9 +3508,55 @@
           </a:p>
         </p:txBody>
       </p:sp>
+      <p:sp>
+        <p:nvSpPr>
+          <p:cNvPr id="14" name="Rectangle 13"/>
+          <p:cNvSpPr/>
+          <p:nvPr/>
+        </p:nvSpPr>
+        <p:spPr>
+          <a:xfrm>
+            <a:off x="293217" y="964531"/>
+            <a:ext cx="140004" cy="559468"/>
+          </a:xfrm>
+          <a:prstGeom prst="rect">
+            <a:avLst/>
+          </a:prstGeom>
+          <a:solidFill>
+            <a:srgbClr val="AD2B2B"/>
+          </a:solidFill>
+          <a:ln w="6350">
+            <a:solidFill>
+              <a:srgbClr val="AD2B2B"/>
+            </a:solidFill>
+          </a:ln>
+          <a:effectLst/>
+        </p:spPr>
+        <p:style>
+          <a:lnRef idx="1">
+            <a:schemeClr val="accent1"/>
+          </a:lnRef>
+          <a:fillRef idx="3">
+            <a:schemeClr val="accent1"/>
+          </a:fillRef>
+          <a:effectRef idx="2">
+            <a:schemeClr val="accent1"/>
+          </a:effectRef>
+          <a:fontRef idx="minor">
+            <a:schemeClr val="lt1"/>
+          </a:fontRef>
+        </p:style>
+        <p:txBody>
+          <a:bodyPr rtlCol="0" anchor="ctr"/>
+          <a:lstStyle/>
+          <a:p>
+            <a:pPr algn="ctr"/>
+          </a:p>
+        </p:txBody>
+      </p:sp>
       <p:cxnSp>
         <p:nvCxnSpPr>
-          <p:cNvPr id="14" name="Connector 13"/>
+          <p:cNvPr id="15" name="Connector 14"/>
           <p:cNvCxnSpPr/>
           <p:nvPr/>
         </p:nvCxnSpPr>
@@ -3545,7 +3591,7 @@
       </p:cxnSp>
       <p:sp>
         <p:nvSpPr>
-          <p:cNvPr id="15" name="TextBox 14"/>
+          <p:cNvPr id="16" name="TextBox 15"/>
           <p:cNvSpPr txBox="1"/>
           <p:nvPr/>
         </p:nvSpPr>
@@ -3578,9 +3624,55 @@
           </a:p>
         </p:txBody>
       </p:sp>
+      <p:sp>
+        <p:nvSpPr>
+          <p:cNvPr id="17" name="Rectangle 16"/>
+          <p:cNvSpPr/>
+          <p:nvPr/>
+        </p:nvSpPr>
+        <p:spPr>
+          <a:xfrm>
+            <a:off x="562457" y="970547"/>
+            <a:ext cx="140004" cy="553452"/>
+          </a:xfrm>
+          <a:prstGeom prst="rect">
+            <a:avLst/>
+          </a:prstGeom>
+          <a:solidFill>
+            <a:srgbClr val="215499"/>
+          </a:solidFill>
+          <a:ln w="6350">
+            <a:solidFill>
+              <a:srgbClr val="215499"/>
+            </a:solidFill>
+          </a:ln>
+          <a:effectLst/>
+        </p:spPr>
+        <p:style>
+          <a:lnRef idx="1">
+            <a:schemeClr val="accent1"/>
+          </a:lnRef>
+          <a:fillRef idx="3">
+            <a:schemeClr val="accent1"/>
+          </a:fillRef>
+          <a:effectRef idx="2">
+            <a:schemeClr val="accent1"/>
+          </a:effectRef>
+          <a:fontRef idx="minor">
+            <a:schemeClr val="lt1"/>
+          </a:fontRef>
+        </p:style>
+        <p:txBody>
+          <a:bodyPr rtlCol="0" anchor="ctr"/>
+          <a:lstStyle/>
+          <a:p>
+            <a:pPr algn="ctr"/>
+          </a:p>
+        </p:txBody>
+      </p:sp>
       <p:cxnSp>
         <p:nvCxnSpPr>
-          <p:cNvPr id="16" name="Connector 15"/>
+          <p:cNvPr id="18" name="Connector 17"/>
           <p:cNvCxnSpPr/>
           <p:nvPr/>
         </p:nvCxnSpPr>
@@ -3615,7 +3707,7 @@
       </p:cxnSp>
       <p:sp>
         <p:nvSpPr>
-          <p:cNvPr id="17" name="TextBox 16"/>
+          <p:cNvPr id="19" name="TextBox 18"/>
           <p:cNvSpPr txBox="1"/>
           <p:nvPr/>
         </p:nvSpPr>
@@ -3648,9 +3740,55 @@
           </a:p>
         </p:txBody>
       </p:sp>
+      <p:sp>
+        <p:nvSpPr>
+          <p:cNvPr id="20" name="Rectangle 19"/>
+          <p:cNvSpPr/>
+          <p:nvPr/>
+        </p:nvSpPr>
+        <p:spPr>
+          <a:xfrm>
+            <a:off x="831697" y="1120942"/>
+            <a:ext cx="140004" cy="403057"/>
+          </a:xfrm>
+          <a:prstGeom prst="rect">
+            <a:avLst/>
+          </a:prstGeom>
+          <a:solidFill>
+            <a:srgbClr val="215499"/>
+          </a:solidFill>
+          <a:ln w="6350">
+            <a:solidFill>
+              <a:srgbClr val="215499"/>
+            </a:solidFill>
+          </a:ln>
+          <a:effectLst/>
+        </p:spPr>
+        <p:style>
+          <a:lnRef idx="1">
+            <a:schemeClr val="accent1"/>
+          </a:lnRef>
+          <a:fillRef idx="3">
+            <a:schemeClr val="accent1"/>
+          </a:fillRef>
+          <a:effectRef idx="2">
+            <a:schemeClr val="accent1"/>
+          </a:effectRef>
+          <a:fontRef idx="minor">
+            <a:schemeClr val="lt1"/>
+          </a:fontRef>
+        </p:style>
+        <p:txBody>
+          <a:bodyPr rtlCol="0" anchor="ctr"/>
+          <a:lstStyle/>
+          <a:p>
+            <a:pPr algn="ctr"/>
+          </a:p>
+        </p:txBody>
+      </p:sp>
       <p:cxnSp>
         <p:nvCxnSpPr>
-          <p:cNvPr id="18" name="Connector 17"/>
+          <p:cNvPr id="21" name="Connector 20"/>
           <p:cNvCxnSpPr/>
           <p:nvPr/>
         </p:nvCxnSpPr>
@@ -3685,7 +3823,7 @@
       </p:cxnSp>
       <p:sp>
         <p:nvSpPr>
-          <p:cNvPr id="19" name="TextBox 18"/>
+          <p:cNvPr id="22" name="TextBox 21"/>
           <p:cNvSpPr txBox="1"/>
           <p:nvPr/>
         </p:nvSpPr>
@@ -3718,9 +3856,55 @@
           </a:p>
         </p:txBody>
       </p:sp>
+      <p:sp>
+        <p:nvSpPr>
+          <p:cNvPr id="23" name="Rectangle 22"/>
+          <p:cNvSpPr/>
+          <p:nvPr/>
+        </p:nvSpPr>
+        <p:spPr>
+          <a:xfrm>
+            <a:off x="1100937" y="1187115"/>
+            <a:ext cx="140004" cy="336884"/>
+          </a:xfrm>
+          <a:prstGeom prst="rect">
+            <a:avLst/>
+          </a:prstGeom>
+          <a:solidFill>
+            <a:srgbClr val="215499"/>
+          </a:solidFill>
+          <a:ln w="6350">
+            <a:solidFill>
+              <a:srgbClr val="215499"/>
+            </a:solidFill>
+          </a:ln>
+          <a:effectLst/>
+        </p:spPr>
+        <p:style>
+          <a:lnRef idx="1">
+            <a:schemeClr val="accent1"/>
+          </a:lnRef>
+          <a:fillRef idx="3">
+            <a:schemeClr val="accent1"/>
+          </a:fillRef>
+          <a:effectRef idx="2">
+            <a:schemeClr val="accent1"/>
+          </a:effectRef>
+          <a:fontRef idx="minor">
+            <a:schemeClr val="lt1"/>
+          </a:fontRef>
+        </p:style>
+        <p:txBody>
+          <a:bodyPr rtlCol="0" anchor="ctr"/>
+          <a:lstStyle/>
+          <a:p>
+            <a:pPr algn="ctr"/>
+          </a:p>
+        </p:txBody>
+      </p:sp>
       <p:cxnSp>
         <p:nvCxnSpPr>
-          <p:cNvPr id="20" name="Connector 19"/>
+          <p:cNvPr id="24" name="Connector 23"/>
           <p:cNvCxnSpPr/>
           <p:nvPr/>
         </p:nvCxnSpPr>
@@ -3755,7 +3939,7 @@
       </p:cxnSp>
       <p:sp>
         <p:nvSpPr>
-          <p:cNvPr id="21" name="TextBox 20"/>
+          <p:cNvPr id="25" name="TextBox 24"/>
           <p:cNvSpPr txBox="1"/>
           <p:nvPr/>
         </p:nvSpPr>
@@ -3790,22 +3974,24 @@
       </p:sp>
       <p:sp>
         <p:nvSpPr>
-          <p:cNvPr id="22" name="Rectangle 21"/>
+          <p:cNvPr id="26" name="Rectangle 25"/>
           <p:cNvSpPr/>
           <p:nvPr/>
         </p:nvSpPr>
         <p:spPr>
           <a:xfrm>
-            <a:off x="304800" y="660400"/>
-            <a:ext cx="1193800" cy="508000"/>
+            <a:off x="1370177" y="1090863"/>
+            <a:ext cx="140004" cy="433136"/>
           </a:xfrm>
           <a:prstGeom prst="rect">
             <a:avLst/>
           </a:prstGeom>
-          <a:noFill/>
-          <a:ln w="7620">
+          <a:solidFill>
+            <a:srgbClr val="AD6B0A"/>
+          </a:solidFill>
+          <a:ln w="6350">
             <a:solidFill>
-              <a:srgbClr val="9EA5AD"/>
+              <a:srgbClr val="AD6B0A"/>
             </a:solidFill>
           </a:ln>
           <a:effectLst/>
@@ -3834,112 +4020,7 @@
       </p:sp>
       <p:sp>
         <p:nvSpPr>
-          <p:cNvPr id="23" name="TextBox 22"/>
-          <p:cNvSpPr txBox="1"/>
-          <p:nvPr/>
-        </p:nvSpPr>
-        <p:spPr>
-          <a:xfrm>
-            <a:off x="-622300" y="777875"/>
-            <a:ext cx="3048000" cy="152400"/>
-          </a:xfrm>
-          <a:prstGeom prst="rect">
-            <a:avLst/>
-          </a:prstGeom>
-          <a:noFill/>
-        </p:spPr>
-        <p:txBody>
-          <a:bodyPr wrap="none" lIns="0" rIns="0" tIns="0" bIns="0" anchor="ctr">
-            <a:spAutoFit/>
-          </a:bodyPr>
-          <a:lstStyle/>
-          <a:p>
-            <a:pPr algn="ctr"/>
-            <a:r>
-              <a:rPr sz="500" b="0" i="0">
-                <a:solidFill>
-                  <a:srgbClr val="6B727C"/>
-                </a:solidFill>
-                <a:latin typeface="Helvetica"/>
-              </a:rPr>
-              <a:t>measured from the</a:t>
-            </a:r>
-          </a:p>
-        </p:txBody>
-      </p:sp>
-      <p:sp>
-        <p:nvSpPr>
-          <p:cNvPr id="24" name="TextBox 23"/>
-          <p:cNvSpPr txBox="1"/>
-          <p:nvPr/>
-        </p:nvSpPr>
-        <p:spPr>
-          <a:xfrm>
-            <a:off x="-622300" y="866775"/>
-            <a:ext cx="3048000" cy="152400"/>
-          </a:xfrm>
-          <a:prstGeom prst="rect">
-            <a:avLst/>
-          </a:prstGeom>
-          <a:noFill/>
-        </p:spPr>
-        <p:txBody>
-          <a:bodyPr wrap="none" lIns="0" rIns="0" tIns="0" bIns="0" anchor="ctr">
-            <a:spAutoFit/>
-          </a:bodyPr>
-          <a:lstStyle/>
-          <a:p>
-            <a:pPr algn="ctr"/>
-            <a:r>
-              <a:rPr sz="500" b="0" i="0">
-                <a:solidFill>
-                  <a:srgbClr val="6B727C"/>
-                </a:solidFill>
-                <a:latin typeface="Helvetica"/>
-              </a:rPr>
-              <a:t>evaluation episodes</a:t>
-            </a:r>
-          </a:p>
-        </p:txBody>
-      </p:sp>
-      <p:sp>
-        <p:nvSpPr>
-          <p:cNvPr id="25" name="TextBox 24"/>
-          <p:cNvSpPr txBox="1"/>
-          <p:nvPr/>
-        </p:nvSpPr>
-        <p:spPr>
-          <a:xfrm>
-            <a:off x="-622300" y="955675"/>
-            <a:ext cx="3048000" cy="152400"/>
-          </a:xfrm>
-          <a:prstGeom prst="rect">
-            <a:avLst/>
-          </a:prstGeom>
-          <a:noFill/>
-        </p:spPr>
-        <p:txBody>
-          <a:bodyPr wrap="none" lIns="0" rIns="0" tIns="0" bIns="0" anchor="ctr">
-            <a:spAutoFit/>
-          </a:bodyPr>
-          <a:lstStyle/>
-          <a:p>
-            <a:pPr algn="ctr"/>
-            <a:r>
-              <a:rPr sz="500" b="0" i="0">
-                <a:solidFill>
-                  <a:srgbClr val="6B727C"/>
-                </a:solidFill>
-                <a:latin typeface="Helvetica"/>
-              </a:rPr>
-              <a:t>(Section 4.2)</a:t>
-            </a:r>
-          </a:p>
-        </p:txBody>
-      </p:sp>
-      <p:sp>
-        <p:nvSpPr>
-          <p:cNvPr id="26" name="TextBox 25"/>
+          <p:cNvPr id="27" name="TextBox 26"/>
           <p:cNvSpPr txBox="1"/>
           <p:nvPr/>
         </p:nvSpPr>
@@ -3974,7 +4055,7 @@
       </p:sp>
       <p:sp>
         <p:nvSpPr>
-          <p:cNvPr id="27" name="TextBox 26"/>
+          <p:cNvPr id="28" name="TextBox 27"/>
           <p:cNvSpPr txBox="1"/>
           <p:nvPr/>
         </p:nvSpPr>
@@ -4009,7 +4090,7 @@
       </p:sp>
       <p:sp>
         <p:nvSpPr>
-          <p:cNvPr id="28" name="TextBox 27"/>
+          <p:cNvPr id="29" name="TextBox 28"/>
           <p:cNvSpPr txBox="1"/>
           <p:nvPr/>
         </p:nvSpPr>
@@ -4037,14 +4118,14 @@
                 </a:solidFill>
                 <a:latin typeface="Helvetica"/>
               </a:rPr>
-              <a:t>BEST FIXED gap = [MAIN_HET_GAP]</a:t>
-            </a:r>
-          </a:p>
-        </p:txBody>
-      </p:sp>
-      <p:sp>
-        <p:nvSpPr>
-          <p:cNvPr id="29" name="TextBox 28"/>
+              <a:t>BEST FIXED gap = 0.124</a:t>
+            </a:r>
+          </a:p>
+        </p:txBody>
+      </p:sp>
+      <p:sp>
+        <p:nvSpPr>
+          <p:cNvPr id="30" name="TextBox 29"/>
           <p:cNvSpPr txBox="1"/>
           <p:nvPr/>
         </p:nvSpPr>
@@ -4079,7 +4160,7 @@
       </p:sp>
       <p:sp>
         <p:nvSpPr>
-          <p:cNvPr id="30" name="TextBox 29"/>
+          <p:cNvPr id="31" name="TextBox 30"/>
           <p:cNvSpPr txBox="1"/>
           <p:nvPr/>
         </p:nvSpPr>
@@ -4114,7 +4195,7 @@
       </p:sp>
       <p:sp>
         <p:nvSpPr>
-          <p:cNvPr id="31" name="TextBox 30"/>
+          <p:cNvPr id="32" name="TextBox 31"/>
           <p:cNvSpPr txBox="1"/>
           <p:nvPr/>
         </p:nvSpPr>
@@ -4149,7 +4230,7 @@
       </p:sp>
       <p:sp>
         <p:nvSpPr>
-          <p:cNvPr id="32" name="Rounded Rectangle 31"/>
+          <p:cNvPr id="33" name="Rounded Rectangle 32"/>
           <p:cNvSpPr/>
           <p:nvPr/>
         </p:nvSpPr>
@@ -4197,7 +4278,7 @@
       </p:sp>
       <p:sp>
         <p:nvSpPr>
-          <p:cNvPr id="33" name="TextBox 32"/>
+          <p:cNvPr id="34" name="TextBox 33"/>
           <p:cNvSpPr txBox="1"/>
           <p:nvPr/>
         </p:nvSpPr>
@@ -4232,7 +4313,7 @@
       </p:sp>
       <p:sp>
         <p:nvSpPr>
-          <p:cNvPr id="34" name="TextBox 33"/>
+          <p:cNvPr id="35" name="TextBox 34"/>
           <p:cNvSpPr txBox="1"/>
           <p:nvPr/>
         </p:nvSpPr>
@@ -4267,7 +4348,7 @@
       </p:sp>
       <p:cxnSp>
         <p:nvCxnSpPr>
-          <p:cNvPr id="35" name="Connector 34"/>
+          <p:cNvPr id="36" name="Connector 35"/>
           <p:cNvCxnSpPr/>
           <p:nvPr/>
         </p:nvCxnSpPr>
@@ -4302,7 +4383,7 @@
       </p:cxnSp>
       <p:sp>
         <p:nvSpPr>
-          <p:cNvPr id="36" name="Rounded Rectangle 35"/>
+          <p:cNvPr id="37" name="Rounded Rectangle 36"/>
           <p:cNvSpPr/>
           <p:nvPr/>
         </p:nvSpPr>
@@ -4350,7 +4431,7 @@
       </p:sp>
       <p:sp>
         <p:nvSpPr>
-          <p:cNvPr id="37" name="TextBox 36"/>
+          <p:cNvPr id="38" name="TextBox 37"/>
           <p:cNvSpPr txBox="1"/>
           <p:nvPr/>
         </p:nvSpPr>
@@ -4385,7 +4466,7 @@
       </p:sp>
       <p:sp>
         <p:nvSpPr>
-          <p:cNvPr id="38" name="TextBox 37"/>
+          <p:cNvPr id="39" name="TextBox 38"/>
           <p:cNvSpPr txBox="1"/>
           <p:nvPr/>
         </p:nvSpPr>
@@ -4420,7 +4501,7 @@
       </p:sp>
       <p:cxnSp>
         <p:nvCxnSpPr>
-          <p:cNvPr id="39" name="Connector 38"/>
+          <p:cNvPr id="40" name="Connector 39"/>
           <p:cNvCxnSpPr/>
           <p:nvPr/>
         </p:nvCxnSpPr>
@@ -4455,7 +4536,7 @@
       </p:cxnSp>
       <p:sp>
         <p:nvSpPr>
-          <p:cNvPr id="40" name="Rounded Rectangle 39"/>
+          <p:cNvPr id="41" name="Rounded Rectangle 40"/>
           <p:cNvSpPr/>
           <p:nvPr/>
         </p:nvSpPr>
@@ -4503,7 +4584,7 @@
       </p:sp>
       <p:sp>
         <p:nvSpPr>
-          <p:cNvPr id="41" name="TextBox 40"/>
+          <p:cNvPr id="42" name="TextBox 41"/>
           <p:cNvSpPr txBox="1"/>
           <p:nvPr/>
         </p:nvSpPr>
@@ -4538,7 +4619,7 @@
       </p:sp>
       <p:sp>
         <p:nvSpPr>
-          <p:cNvPr id="42" name="TextBox 41"/>
+          <p:cNvPr id="43" name="TextBox 42"/>
           <p:cNvSpPr txBox="1"/>
           <p:nvPr/>
         </p:nvSpPr>
@@ -4573,7 +4654,7 @@
       </p:sp>
       <p:sp>
         <p:nvSpPr>
-          <p:cNvPr id="43" name="TextBox 42"/>
+          <p:cNvPr id="44" name="TextBox 43"/>
           <p:cNvSpPr txBox="1"/>
           <p:nvPr/>
         </p:nvSpPr>
@@ -4608,7 +4689,7 @@
       </p:sp>
       <p:cxnSp>
         <p:nvCxnSpPr>
-          <p:cNvPr id="44" name="Connector 43"/>
+          <p:cNvPr id="45" name="Connector 44"/>
           <p:cNvCxnSpPr/>
           <p:nvPr/>
         </p:nvCxnSpPr>
@@ -4643,7 +4724,7 @@
       </p:cxnSp>
       <p:sp>
         <p:nvSpPr>
-          <p:cNvPr id="45" name="Rounded Rectangle 44"/>
+          <p:cNvPr id="46" name="Rounded Rectangle 45"/>
           <p:cNvSpPr/>
           <p:nvPr/>
         </p:nvSpPr>
@@ -4691,7 +4772,7 @@
       </p:sp>
       <p:sp>
         <p:nvSpPr>
-          <p:cNvPr id="46" name="TextBox 45"/>
+          <p:cNvPr id="47" name="TextBox 46"/>
           <p:cNvSpPr txBox="1"/>
           <p:nvPr/>
         </p:nvSpPr>
@@ -4726,7 +4807,7 @@
       </p:sp>
       <p:sp>
         <p:nvSpPr>
-          <p:cNvPr id="47" name="TextBox 46"/>
+          <p:cNvPr id="48" name="TextBox 47"/>
           <p:cNvSpPr txBox="1"/>
           <p:nvPr/>
         </p:nvSpPr>
@@ -4761,7 +4842,7 @@
       </p:sp>
       <p:sp>
         <p:nvSpPr>
-          <p:cNvPr id="48" name="TextBox 47"/>
+          <p:cNvPr id="49" name="TextBox 48"/>
           <p:cNvSpPr txBox="1"/>
           <p:nvPr/>
         </p:nvSpPr>
@@ -4796,7 +4877,7 @@
       </p:sp>
       <p:sp>
         <p:nvSpPr>
-          <p:cNvPr id="49" name="TextBox 48"/>
+          <p:cNvPr id="50" name="TextBox 49"/>
           <p:cNvSpPr txBox="1"/>
           <p:nvPr/>
         </p:nvSpPr>
@@ -4831,7 +4912,7 @@
       </p:sp>
       <p:sp>
         <p:nvSpPr>
-          <p:cNvPr id="50" name="TextBox 49"/>
+          <p:cNvPr id="51" name="TextBox 50"/>
           <p:cNvSpPr txBox="1"/>
           <p:nvPr/>
         </p:nvSpPr>
@@ -4866,7 +4947,7 @@
       </p:sp>
       <p:sp>
         <p:nvSpPr>
-          <p:cNvPr id="51" name="TextBox 50"/>
+          <p:cNvPr id="52" name="TextBox 51"/>
           <p:cNvSpPr txBox="1"/>
           <p:nvPr/>
         </p:nvSpPr>
@@ -4901,7 +4982,7 @@
       </p:sp>
       <p:sp>
         <p:nvSpPr>
-          <p:cNvPr id="52" name="TextBox 51"/>
+          <p:cNvPr id="53" name="TextBox 52"/>
           <p:cNvSpPr txBox="1"/>
           <p:nvPr/>
         </p:nvSpPr>
@@ -4936,7 +5017,7 @@
       </p:sp>
       <p:sp>
         <p:nvSpPr>
-          <p:cNvPr id="53" name="Rounded Rectangle 52"/>
+          <p:cNvPr id="54" name="Rounded Rectangle 53"/>
           <p:cNvSpPr/>
           <p:nvPr/>
         </p:nvSpPr>
@@ -4984,7 +5065,7 @@
       </p:sp>
       <p:sp>
         <p:nvSpPr>
-          <p:cNvPr id="54" name="TextBox 53"/>
+          <p:cNvPr id="55" name="TextBox 54"/>
           <p:cNvSpPr txBox="1"/>
           <p:nvPr/>
         </p:nvSpPr>
@@ -5019,7 +5100,7 @@
       </p:sp>
       <p:cxnSp>
         <p:nvCxnSpPr>
-          <p:cNvPr id="55" name="Connector 54"/>
+          <p:cNvPr id="56" name="Connector 55"/>
           <p:cNvCxnSpPr/>
           <p:nvPr/>
         </p:nvCxnSpPr>
@@ -5054,7 +5135,7 @@
       </p:cxnSp>
       <p:sp>
         <p:nvSpPr>
-          <p:cNvPr id="56" name="Rounded Rectangle 55"/>
+          <p:cNvPr id="57" name="Rounded Rectangle 56"/>
           <p:cNvSpPr/>
           <p:nvPr/>
         </p:nvSpPr>
@@ -5102,7 +5183,7 @@
       </p:sp>
       <p:sp>
         <p:nvSpPr>
-          <p:cNvPr id="57" name="TextBox 56"/>
+          <p:cNvPr id="58" name="TextBox 57"/>
           <p:cNvSpPr txBox="1"/>
           <p:nvPr/>
         </p:nvSpPr>
@@ -5137,7 +5218,7 @@
       </p:sp>
       <p:sp>
         <p:nvSpPr>
-          <p:cNvPr id="58" name="TextBox 57"/>
+          <p:cNvPr id="59" name="TextBox 58"/>
           <p:cNvSpPr txBox="1"/>
           <p:nvPr/>
         </p:nvSpPr>
@@ -5172,7 +5253,7 @@
       </p:sp>
       <p:cxnSp>
         <p:nvCxnSpPr>
-          <p:cNvPr id="59" name="Connector 58"/>
+          <p:cNvPr id="60" name="Connector 59"/>
           <p:cNvCxnSpPr/>
           <p:nvPr/>
         </p:nvCxnSpPr>
@@ -5207,7 +5288,7 @@
       </p:cxnSp>
       <p:sp>
         <p:nvSpPr>
-          <p:cNvPr id="60" name="Rounded Rectangle 59"/>
+          <p:cNvPr id="61" name="Rounded Rectangle 60"/>
           <p:cNvSpPr/>
           <p:nvPr/>
         </p:nvSpPr>
@@ -5255,7 +5336,7 @@
       </p:sp>
       <p:sp>
         <p:nvSpPr>
-          <p:cNvPr id="61" name="TextBox 60"/>
+          <p:cNvPr id="62" name="TextBox 61"/>
           <p:cNvSpPr txBox="1"/>
           <p:nvPr/>
         </p:nvSpPr>
@@ -5290,7 +5371,7 @@
       </p:sp>
       <p:sp>
         <p:nvSpPr>
-          <p:cNvPr id="62" name="TextBox 61"/>
+          <p:cNvPr id="63" name="TextBox 62"/>
           <p:cNvSpPr txBox="1"/>
           <p:nvPr/>
         </p:nvSpPr>
@@ -5325,7 +5406,7 @@
       </p:sp>
       <p:cxnSp>
         <p:nvCxnSpPr>
-          <p:cNvPr id="63" name="Connector 62"/>
+          <p:cNvPr id="64" name="Connector 63"/>
           <p:cNvCxnSpPr/>
           <p:nvPr/>
         </p:nvCxnSpPr>
@@ -5360,7 +5441,7 @@
       </p:cxnSp>
       <p:sp>
         <p:nvSpPr>
-          <p:cNvPr id="64" name="Diamond 63"/>
+          <p:cNvPr id="65" name="Diamond 64"/>
           <p:cNvSpPr/>
           <p:nvPr/>
         </p:nvSpPr>
@@ -5406,7 +5487,7 @@
       </p:sp>
       <p:sp>
         <p:nvSpPr>
-          <p:cNvPr id="65" name="TextBox 64"/>
+          <p:cNvPr id="66" name="TextBox 65"/>
           <p:cNvSpPr txBox="1"/>
           <p:nvPr/>
         </p:nvSpPr>
@@ -5441,7 +5522,7 @@
       </p:sp>
       <p:cxnSp>
         <p:nvCxnSpPr>
-          <p:cNvPr id="66" name="Connector 65"/>
+          <p:cNvPr id="67" name="Connector 66"/>
           <p:cNvCxnSpPr/>
           <p:nvPr/>
         </p:nvCxnSpPr>
@@ -5476,7 +5557,7 @@
       </p:cxnSp>
       <p:sp>
         <p:nvSpPr>
-          <p:cNvPr id="67" name="TextBox 66"/>
+          <p:cNvPr id="68" name="TextBox 67"/>
           <p:cNvSpPr txBox="1"/>
           <p:nvPr/>
         </p:nvSpPr>
@@ -5511,7 +5592,7 @@
       </p:sp>
       <p:cxnSp>
         <p:nvCxnSpPr>
-          <p:cNvPr id="68" name="Connector 67"/>
+          <p:cNvPr id="69" name="Connector 68"/>
           <p:cNvCxnSpPr/>
           <p:nvPr/>
         </p:nvCxnSpPr>
@@ -5546,7 +5627,7 @@
       </p:cxnSp>
       <p:sp>
         <p:nvSpPr>
-          <p:cNvPr id="69" name="TextBox 68"/>
+          <p:cNvPr id="70" name="TextBox 69"/>
           <p:cNvSpPr txBox="1"/>
           <p:nvPr/>
         </p:nvSpPr>
@@ -5581,7 +5662,7 @@
       </p:sp>
       <p:sp>
         <p:nvSpPr>
-          <p:cNvPr id="70" name="Rounded Rectangle 69"/>
+          <p:cNvPr id="71" name="Rounded Rectangle 70"/>
           <p:cNvSpPr/>
           <p:nvPr/>
         </p:nvSpPr>
@@ -5629,7 +5710,7 @@
       </p:sp>
       <p:sp>
         <p:nvSpPr>
-          <p:cNvPr id="71" name="TextBox 70"/>
+          <p:cNvPr id="72" name="TextBox 71"/>
           <p:cNvSpPr txBox="1"/>
           <p:nvPr/>
         </p:nvSpPr>
@@ -5664,7 +5745,7 @@
       </p:sp>
       <p:sp>
         <p:nvSpPr>
-          <p:cNvPr id="72" name="TextBox 71"/>
+          <p:cNvPr id="73" name="TextBox 72"/>
           <p:cNvSpPr txBox="1"/>
           <p:nvPr/>
         </p:nvSpPr>
@@ -5699,7 +5780,7 @@
       </p:sp>
       <p:sp>
         <p:nvSpPr>
-          <p:cNvPr id="73" name="Rounded Rectangle 72"/>
+          <p:cNvPr id="74" name="Rounded Rectangle 73"/>
           <p:cNvSpPr/>
           <p:nvPr/>
         </p:nvSpPr>
@@ -5747,7 +5828,7 @@
       </p:sp>
       <p:sp>
         <p:nvSpPr>
-          <p:cNvPr id="74" name="TextBox 73"/>
+          <p:cNvPr id="75" name="TextBox 74"/>
           <p:cNvSpPr txBox="1"/>
           <p:nvPr/>
         </p:nvSpPr>
@@ -5782,7 +5863,7 @@
       </p:sp>
       <p:sp>
         <p:nvSpPr>
-          <p:cNvPr id="75" name="TextBox 74"/>
+          <p:cNvPr id="76" name="TextBox 75"/>
           <p:cNvSpPr txBox="1"/>
           <p:nvPr/>
         </p:nvSpPr>
@@ -5817,7 +5898,7 @@
       </p:sp>
       <p:sp>
         <p:nvSpPr>
-          <p:cNvPr id="76" name="TextBox 75"/>
+          <p:cNvPr id="77" name="TextBox 76"/>
           <p:cNvSpPr txBox="1"/>
           <p:nvPr/>
         </p:nvSpPr>
@@ -5852,7 +5933,7 @@
       </p:sp>
       <p:cxnSp>
         <p:nvCxnSpPr>
-          <p:cNvPr id="77" name="Connector 76"/>
+          <p:cNvPr id="78" name="Connector 77"/>
           <p:cNvCxnSpPr/>
           <p:nvPr/>
         </p:nvCxnSpPr>
@@ -5888,7 +5969,7 @@
       </p:cxnSp>
       <p:cxnSp>
         <p:nvCxnSpPr>
-          <p:cNvPr id="78" name="Connector 77"/>
+          <p:cNvPr id="79" name="Connector 78"/>
           <p:cNvCxnSpPr/>
           <p:nvPr/>
         </p:nvCxnSpPr>

--- a/latex/figure/fig1_selective_governance.pptx
+++ b/latex/figure/fig1_selective_governance.pptx
@@ -3516,8 +3516,8 @@
         </p:nvSpPr>
         <p:spPr>
           <a:xfrm>
-            <a:off x="293217" y="964531"/>
-            <a:ext cx="140004" cy="559468"/>
+            <a:off x="293217" y="991602"/>
+            <a:ext cx="140004" cy="532397"/>
           </a:xfrm>
           <a:prstGeom prst="rect">
             <a:avLst/>
@@ -3632,8 +3632,8 @@
         </p:nvSpPr>
         <p:spPr>
           <a:xfrm>
-            <a:off x="562457" y="970547"/>
-            <a:ext cx="140004" cy="553452"/>
+            <a:off x="562457" y="1035718"/>
+            <a:ext cx="140004" cy="488281"/>
           </a:xfrm>
           <a:prstGeom prst="rect">
             <a:avLst/>
@@ -3748,8 +3748,8 @@
         </p:nvSpPr>
         <p:spPr>
           <a:xfrm>
-            <a:off x="831697" y="1120942"/>
-            <a:ext cx="140004" cy="403057"/>
+            <a:off x="831697" y="1079834"/>
+            <a:ext cx="140004" cy="444165"/>
           </a:xfrm>
           <a:prstGeom prst="rect">
             <a:avLst/>
@@ -3864,8 +3864,8 @@
         </p:nvSpPr>
         <p:spPr>
           <a:xfrm>
-            <a:off x="1100937" y="1187115"/>
-            <a:ext cx="140004" cy="336884"/>
+            <a:off x="1100937" y="1167063"/>
+            <a:ext cx="140004" cy="356936"/>
           </a:xfrm>
           <a:prstGeom prst="rect">
             <a:avLst/>
@@ -3980,8 +3980,8 @@
         </p:nvSpPr>
         <p:spPr>
           <a:xfrm>
-            <a:off x="1370177" y="1090863"/>
-            <a:ext cx="140004" cy="433136"/>
+            <a:off x="1370177" y="1059781"/>
+            <a:ext cx="140004" cy="464218"/>
           </a:xfrm>
           <a:prstGeom prst="rect">
             <a:avLst/>
@@ -4118,7 +4118,7 @@
                 </a:solidFill>
                 <a:latin typeface="Helvetica"/>
               </a:rPr>
-              <a:t>BEST FIXED gap = 0.124</a:t>
+              <a:t>BEST FIXED gap = 0.131</a:t>
             </a:r>
           </a:p>
         </p:txBody>
